--- a/topic04-functions-and-lambda-calculus/unit-04a-lectures/talk-2/b-lambda-calculus.pptx
+++ b/topic04-functions-and-lambda-calculus/unit-04a-lectures/talk-2/b-lambda-calculus.pptx
@@ -17,12 +17,12 @@
     <p:sldId id="306" r:id="rId8"/>
     <p:sldId id="271" r:id="rId9"/>
     <p:sldId id="275" r:id="rId10"/>
-    <p:sldId id="346" r:id="rId11"/>
-    <p:sldId id="347" r:id="rId12"/>
-    <p:sldId id="348" r:id="rId13"/>
-    <p:sldId id="278" r:id="rId14"/>
-    <p:sldId id="282" r:id="rId15"/>
-    <p:sldId id="284" r:id="rId16"/>
+    <p:sldId id="278" r:id="rId11"/>
+    <p:sldId id="282" r:id="rId12"/>
+    <p:sldId id="284" r:id="rId13"/>
+    <p:sldId id="346" r:id="rId14"/>
+    <p:sldId id="347" r:id="rId15"/>
+    <p:sldId id="348" r:id="rId16"/>
     <p:sldId id="287" r:id="rId17"/>
     <p:sldId id="349" r:id="rId18"/>
     <p:sldId id="350" r:id="rId19"/>
@@ -228,7 +228,7 @@
           <a:p>
             <a:fld id="{8029FFF4-1735-2D4F-B84F-F6C1BAB36A7E}" type="datetimeFigureOut">
               <a:rPr lang="en-US" smtClean="0"/>
-              <a:t>1/29/26</a:t>
+              <a:t>2/5/26</a:t>
             </a:fld>
             <a:endParaRPr lang="en-US"/>
           </a:p>
@@ -865,7 +865,7 @@
           <a:p>
             <a:fld id="{1D8BD707-D9CF-40AE-B4C6-C98DA3205C09}" type="datetimeFigureOut">
               <a:rPr lang="en-US" smtClean="0"/>
-              <a:t>1/29/26</a:t>
+              <a:t>2/5/26</a:t>
             </a:fld>
             <a:endParaRPr lang="en-US"/>
           </a:p>
@@ -1297,7 +1297,7 @@
           <a:p>
             <a:fld id="{1D8BD707-D9CF-40AE-B4C6-C98DA3205C09}" type="datetimeFigureOut">
               <a:rPr lang="en-US" smtClean="0"/>
-              <a:t>1/29/26</a:t>
+              <a:t>2/5/26</a:t>
             </a:fld>
             <a:endParaRPr lang="en-US"/>
           </a:p>
@@ -1646,7 +1646,7 @@
           <a:p>
             <a:fld id="{1D8BD707-D9CF-40AE-B4C6-C98DA3205C09}" type="datetimeFigureOut">
               <a:rPr lang="en-US" smtClean="0"/>
-              <a:t>1/29/26</a:t>
+              <a:t>2/5/26</a:t>
             </a:fld>
             <a:endParaRPr lang="en-US"/>
           </a:p>
@@ -2064,7 +2064,7 @@
           <a:p>
             <a:fld id="{1D8BD707-D9CF-40AE-B4C6-C98DA3205C09}" type="datetimeFigureOut">
               <a:rPr lang="en-US" smtClean="0"/>
-              <a:t>1/29/26</a:t>
+              <a:t>2/5/26</a:t>
             </a:fld>
             <a:endParaRPr lang="en-US"/>
           </a:p>
@@ -2645,7 +2645,7 @@
           <a:p>
             <a:fld id="{1D8BD707-D9CF-40AE-B4C6-C98DA3205C09}" type="datetimeFigureOut">
               <a:rPr lang="en-US" smtClean="0"/>
-              <a:t>1/29/26</a:t>
+              <a:t>2/5/26</a:t>
             </a:fld>
             <a:endParaRPr lang="en-US"/>
           </a:p>
@@ -3339,7 +3339,7 @@
           <a:p>
             <a:fld id="{1D8BD707-D9CF-40AE-B4C6-C98DA3205C09}" type="datetimeFigureOut">
               <a:rPr lang="en-US" smtClean="0"/>
-              <a:t>1/29/26</a:t>
+              <a:t>2/5/26</a:t>
             </a:fld>
             <a:endParaRPr lang="en-US"/>
           </a:p>
@@ -4265,7 +4265,7 @@
           <a:p>
             <a:fld id="{1D8BD707-D9CF-40AE-B4C6-C98DA3205C09}" type="datetimeFigureOut">
               <a:rPr lang="en-US" smtClean="0"/>
-              <a:t>1/29/26</a:t>
+              <a:t>2/5/26</a:t>
             </a:fld>
             <a:endParaRPr lang="en-US"/>
           </a:p>
@@ -4596,7 +4596,7 @@
           <a:p>
             <a:fld id="{1D8BD707-D9CF-40AE-B4C6-C98DA3205C09}" type="datetimeFigureOut">
               <a:rPr lang="en-US" smtClean="0"/>
-              <a:t>1/29/26</a:t>
+              <a:t>2/5/26</a:t>
             </a:fld>
             <a:endParaRPr lang="en-US"/>
           </a:p>
@@ -4875,7 +4875,7 @@
           <a:p>
             <a:fld id="{1D8BD707-D9CF-40AE-B4C6-C98DA3205C09}" type="datetimeFigureOut">
               <a:rPr lang="en-US" smtClean="0"/>
-              <a:t>1/29/26</a:t>
+              <a:t>2/5/26</a:t>
             </a:fld>
             <a:endParaRPr lang="en-US"/>
           </a:p>
@@ -5101,7 +5101,7 @@
           <a:p>
             <a:fld id="{1D8BD707-D9CF-40AE-B4C6-C98DA3205C09}" type="datetimeFigureOut">
               <a:rPr lang="en-US"/>
-              <a:t>1/29/26</a:t>
+              <a:t>2/5/26</a:t>
             </a:fld>
             <a:endParaRPr lang="en-US"/>
           </a:p>
@@ -5427,7 +5427,7 @@
           <a:p>
             <a:fld id="{1D8BD707-D9CF-40AE-B4C6-C98DA3205C09}" type="datetimeFigureOut">
               <a:rPr lang="en-US" smtClean="0"/>
-              <a:t>1/29/26</a:t>
+              <a:t>2/5/26</a:t>
             </a:fld>
             <a:endParaRPr lang="en-US"/>
           </a:p>
@@ -5834,7 +5834,7 @@
           <a:p>
             <a:fld id="{1D8BD707-D9CF-40AE-B4C6-C98DA3205C09}" type="datetimeFigureOut">
               <a:rPr lang="en-US" smtClean="0"/>
-              <a:t>1/29/26</a:t>
+              <a:t>2/5/26</a:t>
             </a:fld>
             <a:endParaRPr lang="en-US"/>
           </a:p>
@@ -6233,7 +6233,7 @@
           <a:p>
             <a:fld id="{1D8BD707-D9CF-40AE-B4C6-C98DA3205C09}" type="datetimeFigureOut">
               <a:rPr lang="en-US" smtClean="0"/>
-              <a:t>1/29/26</a:t>
+              <a:t>2/5/26</a:t>
             </a:fld>
             <a:endParaRPr lang="en-US"/>
           </a:p>
@@ -6752,7 +6752,7 @@
           <a:p>
             <a:fld id="{1D8BD707-D9CF-40AE-B4C6-C98DA3205C09}" type="datetimeFigureOut">
               <a:rPr lang="en-US" smtClean="0"/>
-              <a:t>1/29/26</a:t>
+              <a:t>2/5/26</a:t>
             </a:fld>
             <a:endParaRPr lang="en-US"/>
           </a:p>
@@ -7036,7 +7036,7 @@
           <a:p>
             <a:fld id="{1D8BD707-D9CF-40AE-B4C6-C98DA3205C09}" type="datetimeFigureOut">
               <a:rPr lang="en-US" smtClean="0"/>
-              <a:t>1/29/26</a:t>
+              <a:t>2/5/26</a:t>
             </a:fld>
             <a:endParaRPr lang="en-US"/>
           </a:p>
@@ -7205,7 +7205,7 @@
           <a:p>
             <a:fld id="{1D8BD707-D9CF-40AE-B4C6-C98DA3205C09}" type="datetimeFigureOut">
               <a:rPr lang="en-US" smtClean="0"/>
-              <a:t>1/29/26</a:t>
+              <a:t>2/5/26</a:t>
             </a:fld>
             <a:endParaRPr lang="en-US"/>
           </a:p>
@@ -7608,7 +7608,7 @@
           <a:p>
             <a:fld id="{1D8BD707-D9CF-40AE-B4C6-C98DA3205C09}" type="datetimeFigureOut">
               <a:rPr lang="en-US" smtClean="0"/>
-              <a:t>1/29/26</a:t>
+              <a:t>2/5/26</a:t>
             </a:fld>
             <a:endParaRPr lang="en-US"/>
           </a:p>
@@ -8030,7 +8030,7 @@
           <a:p>
             <a:fld id="{1D8BD707-D9CF-40AE-B4C6-C98DA3205C09}" type="datetimeFigureOut">
               <a:rPr lang="en-US" smtClean="0"/>
-              <a:t>1/29/26</a:t>
+              <a:t>2/5/26</a:t>
             </a:fld>
             <a:endParaRPr lang="en-US"/>
           </a:p>
@@ -8145,7 +8145,7 @@
           </a:prstGeom>
           <a:extLst>
             <a:ext uri="{909E8E84-426E-40dd-AFC4-6F175D3DCCD1}">
-              <a14:hiddenFill xmlns:a14="http://schemas.microsoft.com/office/drawing/2010/main" xmlns="">
+              <a14:hiddenFill xmlns="" xmlns:a14="http://schemas.microsoft.com/office/drawing/2010/main">
                 <a:solidFill>
                   <a:srgbClr val="FFFFFF"/>
                 </a:solidFill>
@@ -8284,7 +8284,7 @@
           <a:p>
             <a:fld id="{1D8BD707-D9CF-40AE-B4C6-C98DA3205C09}" type="datetimeFigureOut">
               <a:rPr lang="en-US" smtClean="0"/>
-              <a:t>1/29/26</a:t>
+              <a:t>2/5/26</a:t>
             </a:fld>
             <a:endParaRPr lang="en-US"/>
           </a:p>
@@ -8833,14 +8833,14 @@
           </a:xfrm>
           <a:extLst>
             <a:ext uri="{909E8E84-426E-40dd-AFC4-6F175D3DCCD1}">
-              <a14:hiddenFill xmlns="" xmlns:a14="http://schemas.microsoft.com/office/drawing/2010/main">
+              <a14:hiddenFill xmlns:a14="http://schemas.microsoft.com/office/drawing/2010/main" xmlns="">
                 <a:solidFill>
                   <a:srgbClr val="FFFFFF"/>
                 </a:solidFill>
               </a14:hiddenFill>
             </a:ext>
             <a:ext uri="{91240B29-F687-4f45-9708-019B960494DF}">
-              <a14:hiddenLine xmlns="" xmlns:a14="http://schemas.microsoft.com/office/drawing/2010/main" w="9525">
+              <a14:hiddenLine xmlns:a14="http://schemas.microsoft.com/office/drawing/2010/main" xmlns="" w="9525">
                 <a:solidFill>
                   <a:srgbClr val="000000"/>
                 </a:solidFill>
@@ -8996,1755 +8996,6 @@
 </file>
 
 <file path=ppt/slides/slide10.xml><?xml version="1.0" encoding="utf-8"?>
-<p:sld xmlns:a="http://schemas.openxmlformats.org/drawingml/2006/main" xmlns:r="http://schemas.openxmlformats.org/officeDocument/2006/relationships" xmlns:p="http://schemas.openxmlformats.org/presentationml/2006/main">
-  <p:cSld>
-    <p:spTree>
-      <p:nvGrpSpPr>
-        <p:cNvPr id="1" name=""/>
-        <p:cNvGrpSpPr/>
-        <p:nvPr/>
-      </p:nvGrpSpPr>
-      <p:grpSpPr>
-        <a:xfrm>
-          <a:off x="0" y="0"/>
-          <a:ext cx="0" cy="0"/>
-          <a:chOff x="0" y="0"/>
-          <a:chExt cx="0" cy="0"/>
-        </a:xfrm>
-      </p:grpSpPr>
-      <p:sp>
-        <p:nvSpPr>
-          <p:cNvPr id="2" name="Title 1">
-            <a:extLst>
-              <a:ext uri="{FF2B5EF4-FFF2-40B4-BE49-F238E27FC236}">
-                <a16:creationId xmlns:a16="http://schemas.microsoft.com/office/drawing/2014/main" id="{2864372D-1F4A-209C-68DB-CBD3408D1467}"/>
-              </a:ext>
-            </a:extLst>
-          </p:cNvPr>
-          <p:cNvSpPr>
-            <a:spLocks noGrp="1"/>
-          </p:cNvSpPr>
-          <p:nvPr>
-            <p:ph type="title"/>
-          </p:nvPr>
-        </p:nvSpPr>
-        <p:spPr/>
-        <p:txBody>
-          <a:bodyPr>
-            <a:normAutofit/>
-          </a:bodyPr>
-          <a:lstStyle/>
-          <a:p>
-            <a:r>
-              <a:rPr lang="en-US" sz="1800" b="1" dirty="0"/>
-              <a:t>if expression and lambdas</a:t>
-            </a:r>
-          </a:p>
-        </p:txBody>
-      </p:sp>
-      <p:sp>
-        <p:nvSpPr>
-          <p:cNvPr id="3" name="Content Placeholder 2">
-            <a:extLst>
-              <a:ext uri="{FF2B5EF4-FFF2-40B4-BE49-F238E27FC236}">
-                <a16:creationId xmlns:a16="http://schemas.microsoft.com/office/drawing/2014/main" id="{C30FE8E5-41D4-7A0F-A698-B75A5A1002E1}"/>
-              </a:ext>
-            </a:extLst>
-          </p:cNvPr>
-          <p:cNvSpPr>
-            <a:spLocks noGrp="1"/>
-          </p:cNvSpPr>
-          <p:nvPr>
-            <p:ph idx="1"/>
-          </p:nvPr>
-        </p:nvSpPr>
-        <p:spPr/>
-        <p:txBody>
-          <a:bodyPr/>
-          <a:lstStyle/>
-          <a:p>
-            <a:r>
-              <a:rPr lang="en-IE" sz="1400" dirty="0"/>
-              <a:t>In Haskell, </a:t>
-            </a:r>
-            <a:r>
-              <a:rPr lang="en-IE" sz="1400" b="1" dirty="0">
-                <a:solidFill>
-                  <a:srgbClr val="FF0000"/>
-                </a:solidFill>
-              </a:rPr>
-              <a:t>if</a:t>
-            </a:r>
-            <a:r>
-              <a:rPr lang="en-IE" sz="1400" dirty="0">
-                <a:solidFill>
-                  <a:srgbClr val="FF0000"/>
-                </a:solidFill>
-              </a:rPr>
-              <a:t> is an expression</a:t>
-            </a:r>
-            <a:r>
-              <a:rPr lang="en-IE" sz="1400" dirty="0"/>
-              <a:t>, not a statement.</a:t>
-            </a:r>
-          </a:p>
-          <a:p>
-            <a:pPr marL="0" indent="0">
-              <a:buNone/>
-            </a:pPr>
-            <a:endParaRPr lang="en-IE" sz="1400" dirty="0"/>
-          </a:p>
-          <a:p>
-            <a:r>
-              <a:rPr lang="en-IE" sz="1400" dirty="0"/>
-              <a:t>That means it can appear </a:t>
-            </a:r>
-            <a:r>
-              <a:rPr lang="en-IE" sz="1400" b="1" dirty="0"/>
-              <a:t>anywhere an expression is allowed</a:t>
-            </a:r>
-            <a:r>
-              <a:rPr lang="en-IE" sz="1400" dirty="0"/>
-              <a:t> — including inside a lambda.</a:t>
-            </a:r>
-          </a:p>
-          <a:p>
-            <a:pPr marL="0" indent="0">
-              <a:buNone/>
-            </a:pPr>
-            <a:endParaRPr lang="en-IE" dirty="0"/>
-          </a:p>
-          <a:p>
-            <a:endParaRPr lang="en-US" dirty="0"/>
-          </a:p>
-        </p:txBody>
-      </p:sp>
-      <p:sp>
-        <p:nvSpPr>
-          <p:cNvPr id="4" name="Slide Number Placeholder 2">
-            <a:extLst>
-              <a:ext uri="{FF2B5EF4-FFF2-40B4-BE49-F238E27FC236}">
-                <a16:creationId xmlns:a16="http://schemas.microsoft.com/office/drawing/2014/main" id="{37003F18-8AC1-6615-0EDF-706F3D66E323}"/>
-              </a:ext>
-            </a:extLst>
-          </p:cNvPr>
-          <p:cNvSpPr>
-            <a:spLocks noGrp="1"/>
-          </p:cNvSpPr>
-          <p:nvPr>
-            <p:ph type="sldNum" sz="quarter" idx="12"/>
-          </p:nvPr>
-        </p:nvSpPr>
-        <p:spPr>
-          <a:xfrm>
-            <a:off x="3957002" y="380102"/>
-            <a:ext cx="583661" cy="550444"/>
-          </a:xfrm>
-          <a:extLst>
-            <a:ext uri="{909E8E84-426E-40dd-AFC4-6F175D3DCCD1}">
-              <a14:hiddenFill xmlns="" xmlns:a14="http://schemas.microsoft.com/office/drawing/2010/main">
-                <a:solidFill>
-                  <a:srgbClr val="FFFFFF"/>
-                </a:solidFill>
-              </a14:hiddenFill>
-            </a:ext>
-            <a:ext uri="{91240B29-F687-4f45-9708-019B960494DF}">
-              <a14:hiddenLine xmlns="" xmlns:a14="http://schemas.microsoft.com/office/drawing/2010/main" w="9525">
-                <a:solidFill>
-                  <a:srgbClr val="000000"/>
-                </a:solidFill>
-                <a:miter lim="800000"/>
-                <a:headEnd/>
-                <a:tailEnd/>
-              </a14:hiddenLine>
-            </a:ext>
-          </a:extLst>
-        </p:spPr>
-        <p:txBody>
-          <a:bodyPr wrap="square" anchor="t">
-            <a:normAutofit/>
-          </a:bodyPr>
-          <a:lstStyle>
-            <a:lvl1pPr>
-              <a:defRPr sz="1412">
-                <a:solidFill>
-                  <a:schemeClr val="tx1"/>
-                </a:solidFill>
-                <a:latin typeface="Tahoma" charset="0"/>
-                <a:ea typeface="ＭＳ Ｐゴシック" charset="0"/>
-                <a:cs typeface="ＭＳ Ｐゴシック" charset="0"/>
-              </a:defRPr>
-            </a:lvl1pPr>
-            <a:lvl2pPr marL="374595" indent="-144075">
-              <a:defRPr sz="1412">
-                <a:solidFill>
-                  <a:schemeClr val="tx1"/>
-                </a:solidFill>
-                <a:latin typeface="Tahoma" charset="0"/>
-                <a:ea typeface="ＭＳ Ｐゴシック" charset="0"/>
-              </a:defRPr>
-            </a:lvl2pPr>
-            <a:lvl3pPr marL="576301" indent="-115260">
-              <a:defRPr sz="1412">
-                <a:solidFill>
-                  <a:schemeClr val="tx1"/>
-                </a:solidFill>
-                <a:latin typeface="Tahoma" charset="0"/>
-                <a:ea typeface="ＭＳ Ｐゴシック" charset="0"/>
-              </a:defRPr>
-            </a:lvl3pPr>
-            <a:lvl4pPr marL="806821" indent="-115260">
-              <a:defRPr sz="1412">
-                <a:solidFill>
-                  <a:schemeClr val="tx1"/>
-                </a:solidFill>
-                <a:latin typeface="Tahoma" charset="0"/>
-                <a:ea typeface="ＭＳ Ｐゴシック" charset="0"/>
-              </a:defRPr>
-            </a:lvl4pPr>
-            <a:lvl5pPr marL="1037341" indent="-115260">
-              <a:defRPr sz="1412">
-                <a:solidFill>
-                  <a:schemeClr val="tx1"/>
-                </a:solidFill>
-                <a:latin typeface="Tahoma" charset="0"/>
-                <a:ea typeface="ＭＳ Ｐゴシック" charset="0"/>
-              </a:defRPr>
-            </a:lvl5pPr>
-            <a:lvl6pPr marL="1267861" indent="-115260" eaLnBrk="0" fontAlgn="base" hangingPunct="0">
-              <a:spcBef>
-                <a:spcPct val="0"/>
-              </a:spcBef>
-              <a:spcAft>
-                <a:spcPct val="0"/>
-              </a:spcAft>
-              <a:defRPr sz="1412">
-                <a:solidFill>
-                  <a:schemeClr val="tx1"/>
-                </a:solidFill>
-                <a:latin typeface="Tahoma" charset="0"/>
-                <a:ea typeface="ＭＳ Ｐゴシック" charset="0"/>
-              </a:defRPr>
-            </a:lvl6pPr>
-            <a:lvl7pPr marL="1498382" indent="-115260" eaLnBrk="0" fontAlgn="base" hangingPunct="0">
-              <a:spcBef>
-                <a:spcPct val="0"/>
-              </a:spcBef>
-              <a:spcAft>
-                <a:spcPct val="0"/>
-              </a:spcAft>
-              <a:defRPr sz="1412">
-                <a:solidFill>
-                  <a:schemeClr val="tx1"/>
-                </a:solidFill>
-                <a:latin typeface="Tahoma" charset="0"/>
-                <a:ea typeface="ＭＳ Ｐゴシック" charset="0"/>
-              </a:defRPr>
-            </a:lvl7pPr>
-            <a:lvl8pPr marL="1728902" indent="-115260" eaLnBrk="0" fontAlgn="base" hangingPunct="0">
-              <a:spcBef>
-                <a:spcPct val="0"/>
-              </a:spcBef>
-              <a:spcAft>
-                <a:spcPct val="0"/>
-              </a:spcAft>
-              <a:defRPr sz="1412">
-                <a:solidFill>
-                  <a:schemeClr val="tx1"/>
-                </a:solidFill>
-                <a:latin typeface="Tahoma" charset="0"/>
-                <a:ea typeface="ＭＳ Ｐゴシック" charset="0"/>
-              </a:defRPr>
-            </a:lvl8pPr>
-            <a:lvl9pPr marL="1959422" indent="-115260" eaLnBrk="0" fontAlgn="base" hangingPunct="0">
-              <a:spcBef>
-                <a:spcPct val="0"/>
-              </a:spcBef>
-              <a:spcAft>
-                <a:spcPct val="0"/>
-              </a:spcAft>
-              <a:defRPr sz="1412">
-                <a:solidFill>
-                  <a:schemeClr val="tx1"/>
-                </a:solidFill>
-                <a:latin typeface="Tahoma" charset="0"/>
-                <a:ea typeface="ＭＳ Ｐゴシック" charset="0"/>
-              </a:defRPr>
-            </a:lvl9pPr>
-          </a:lstStyle>
-          <a:p>
-            <a:pPr>
-              <a:spcAft>
-                <a:spcPts val="303"/>
-              </a:spcAft>
-            </a:pPr>
-            <a:fld id="{CC73A6B6-49ED-C641-8D95-0A84FA800C15}" type="slidenum">
-              <a:rPr lang="en-US" sz="706"/>
-              <a:pPr>
-                <a:spcAft>
-                  <a:spcPts val="303"/>
-                </a:spcAft>
-              </a:pPr>
-              <a:t>10</a:t>
-            </a:fld>
-            <a:endParaRPr lang="en-US" sz="706" dirty="0"/>
-          </a:p>
-        </p:txBody>
-      </p:sp>
-    </p:spTree>
-    <p:extLst>
-      <p:ext uri="{BB962C8B-B14F-4D97-AF65-F5344CB8AC3E}">
-        <p14:creationId xmlns:p14="http://schemas.microsoft.com/office/powerpoint/2010/main" val="1371213711"/>
-      </p:ext>
-    </p:extLst>
-  </p:cSld>
-  <p:clrMapOvr>
-    <a:masterClrMapping/>
-  </p:clrMapOvr>
-  <p:timing>
-    <p:tnLst>
-      <p:par>
-        <p:cTn id="1" dur="indefinite" restart="never" nodeType="tmRoot">
-          <p:childTnLst>
-            <p:seq concurrent="1" nextAc="seek">
-              <p:cTn id="2" dur="indefinite" nodeType="mainSeq">
-                <p:childTnLst>
-                  <p:par>
-                    <p:cTn id="3" fill="hold">
-                      <p:stCondLst>
-                        <p:cond delay="indefinite"/>
-                      </p:stCondLst>
-                      <p:childTnLst>
-                        <p:par>
-                          <p:cTn id="4" fill="hold">
-                            <p:stCondLst>
-                              <p:cond delay="0"/>
-                            </p:stCondLst>
-                            <p:childTnLst>
-                              <p:par>
-                                <p:cTn id="5" presetID="2" presetClass="entr" presetSubtype="4" fill="hold" nodeType="clickEffect">
-                                  <p:stCondLst>
-                                    <p:cond delay="0"/>
-                                  </p:stCondLst>
-                                  <p:childTnLst>
-                                    <p:set>
-                                      <p:cBhvr>
-                                        <p:cTn id="6" dur="1" fill="hold">
-                                          <p:stCondLst>
-                                            <p:cond delay="0"/>
-                                          </p:stCondLst>
-                                        </p:cTn>
-                                        <p:tgtEl>
-                                          <p:spTgt spid="3">
-                                            <p:txEl>
-                                              <p:pRg st="0" end="0"/>
-                                            </p:txEl>
-                                          </p:spTgt>
-                                        </p:tgtEl>
-                                        <p:attrNameLst>
-                                          <p:attrName>style.visibility</p:attrName>
-                                        </p:attrNameLst>
-                                      </p:cBhvr>
-                                      <p:to>
-                                        <p:strVal val="visible"/>
-                                      </p:to>
-                                    </p:set>
-                                    <p:anim calcmode="lin" valueType="num">
-                                      <p:cBhvr additive="base">
-                                        <p:cTn id="7" dur="500" fill="hold"/>
-                                        <p:tgtEl>
-                                          <p:spTgt spid="3">
-                                            <p:txEl>
-                                              <p:pRg st="0" end="0"/>
-                                            </p:txEl>
-                                          </p:spTgt>
-                                        </p:tgtEl>
-                                        <p:attrNameLst>
-                                          <p:attrName>ppt_x</p:attrName>
-                                        </p:attrNameLst>
-                                      </p:cBhvr>
-                                      <p:tavLst>
-                                        <p:tav tm="0">
-                                          <p:val>
-                                            <p:strVal val="#ppt_x"/>
-                                          </p:val>
-                                        </p:tav>
-                                        <p:tav tm="100000">
-                                          <p:val>
-                                            <p:strVal val="#ppt_x"/>
-                                          </p:val>
-                                        </p:tav>
-                                      </p:tavLst>
-                                    </p:anim>
-                                    <p:anim calcmode="lin" valueType="num">
-                                      <p:cBhvr additive="base">
-                                        <p:cTn id="8" dur="500" fill="hold"/>
-                                        <p:tgtEl>
-                                          <p:spTgt spid="3">
-                                            <p:txEl>
-                                              <p:pRg st="0" end="0"/>
-                                            </p:txEl>
-                                          </p:spTgt>
-                                        </p:tgtEl>
-                                        <p:attrNameLst>
-                                          <p:attrName>ppt_y</p:attrName>
-                                        </p:attrNameLst>
-                                      </p:cBhvr>
-                                      <p:tavLst>
-                                        <p:tav tm="0">
-                                          <p:val>
-                                            <p:strVal val="1+#ppt_h/2"/>
-                                          </p:val>
-                                        </p:tav>
-                                        <p:tav tm="100000">
-                                          <p:val>
-                                            <p:strVal val="#ppt_y"/>
-                                          </p:val>
-                                        </p:tav>
-                                      </p:tavLst>
-                                    </p:anim>
-                                  </p:childTnLst>
-                                </p:cTn>
-                              </p:par>
-                            </p:childTnLst>
-                          </p:cTn>
-                        </p:par>
-                      </p:childTnLst>
-                    </p:cTn>
-                  </p:par>
-                  <p:par>
-                    <p:cTn id="9" fill="hold">
-                      <p:stCondLst>
-                        <p:cond delay="indefinite"/>
-                      </p:stCondLst>
-                      <p:childTnLst>
-                        <p:par>
-                          <p:cTn id="10" fill="hold">
-                            <p:stCondLst>
-                              <p:cond delay="0"/>
-                            </p:stCondLst>
-                            <p:childTnLst>
-                              <p:par>
-                                <p:cTn id="11" presetID="2" presetClass="entr" presetSubtype="4" fill="hold" nodeType="clickEffect">
-                                  <p:stCondLst>
-                                    <p:cond delay="0"/>
-                                  </p:stCondLst>
-                                  <p:childTnLst>
-                                    <p:set>
-                                      <p:cBhvr>
-                                        <p:cTn id="12" dur="1" fill="hold">
-                                          <p:stCondLst>
-                                            <p:cond delay="0"/>
-                                          </p:stCondLst>
-                                        </p:cTn>
-                                        <p:tgtEl>
-                                          <p:spTgt spid="3">
-                                            <p:txEl>
-                                              <p:pRg st="2" end="2"/>
-                                            </p:txEl>
-                                          </p:spTgt>
-                                        </p:tgtEl>
-                                        <p:attrNameLst>
-                                          <p:attrName>style.visibility</p:attrName>
-                                        </p:attrNameLst>
-                                      </p:cBhvr>
-                                      <p:to>
-                                        <p:strVal val="visible"/>
-                                      </p:to>
-                                    </p:set>
-                                    <p:anim calcmode="lin" valueType="num">
-                                      <p:cBhvr additive="base">
-                                        <p:cTn id="13" dur="500" fill="hold"/>
-                                        <p:tgtEl>
-                                          <p:spTgt spid="3">
-                                            <p:txEl>
-                                              <p:pRg st="2" end="2"/>
-                                            </p:txEl>
-                                          </p:spTgt>
-                                        </p:tgtEl>
-                                        <p:attrNameLst>
-                                          <p:attrName>ppt_x</p:attrName>
-                                        </p:attrNameLst>
-                                      </p:cBhvr>
-                                      <p:tavLst>
-                                        <p:tav tm="0">
-                                          <p:val>
-                                            <p:strVal val="#ppt_x"/>
-                                          </p:val>
-                                        </p:tav>
-                                        <p:tav tm="100000">
-                                          <p:val>
-                                            <p:strVal val="#ppt_x"/>
-                                          </p:val>
-                                        </p:tav>
-                                      </p:tavLst>
-                                    </p:anim>
-                                    <p:anim calcmode="lin" valueType="num">
-                                      <p:cBhvr additive="base">
-                                        <p:cTn id="14" dur="500" fill="hold"/>
-                                        <p:tgtEl>
-                                          <p:spTgt spid="3">
-                                            <p:txEl>
-                                              <p:pRg st="2" end="2"/>
-                                            </p:txEl>
-                                          </p:spTgt>
-                                        </p:tgtEl>
-                                        <p:attrNameLst>
-                                          <p:attrName>ppt_y</p:attrName>
-                                        </p:attrNameLst>
-                                      </p:cBhvr>
-                                      <p:tavLst>
-                                        <p:tav tm="0">
-                                          <p:val>
-                                            <p:strVal val="1+#ppt_h/2"/>
-                                          </p:val>
-                                        </p:tav>
-                                        <p:tav tm="100000">
-                                          <p:val>
-                                            <p:strVal val="#ppt_y"/>
-                                          </p:val>
-                                        </p:tav>
-                                      </p:tavLst>
-                                    </p:anim>
-                                  </p:childTnLst>
-                                </p:cTn>
-                              </p:par>
-                            </p:childTnLst>
-                          </p:cTn>
-                        </p:par>
-                      </p:childTnLst>
-                    </p:cTn>
-                  </p:par>
-                </p:childTnLst>
-              </p:cTn>
-              <p:prevCondLst>
-                <p:cond evt="onPrev" delay="0">
-                  <p:tgtEl>
-                    <p:sldTgt/>
-                  </p:tgtEl>
-                </p:cond>
-              </p:prevCondLst>
-              <p:nextCondLst>
-                <p:cond evt="onNext" delay="0">
-                  <p:tgtEl>
-                    <p:sldTgt/>
-                  </p:tgtEl>
-                </p:cond>
-              </p:nextCondLst>
-            </p:seq>
-          </p:childTnLst>
-        </p:cTn>
-      </p:par>
-    </p:tnLst>
-  </p:timing>
-</p:sld>
-</file>
-
-<file path=ppt/slides/slide11.xml><?xml version="1.0" encoding="utf-8"?>
-<p:sld xmlns:a="http://schemas.openxmlformats.org/drawingml/2006/main" xmlns:r="http://schemas.openxmlformats.org/officeDocument/2006/relationships" xmlns:p="http://schemas.openxmlformats.org/presentationml/2006/main">
-  <p:cSld>
-    <p:spTree>
-      <p:nvGrpSpPr>
-        <p:cNvPr id="1" name=""/>
-        <p:cNvGrpSpPr/>
-        <p:nvPr/>
-      </p:nvGrpSpPr>
-      <p:grpSpPr>
-        <a:xfrm>
-          <a:off x="0" y="0"/>
-          <a:ext cx="0" cy="0"/>
-          <a:chOff x="0" y="0"/>
-          <a:chExt cx="0" cy="0"/>
-        </a:xfrm>
-      </p:grpSpPr>
-      <p:sp>
-        <p:nvSpPr>
-          <p:cNvPr id="2" name="Title 1">
-            <a:extLst>
-              <a:ext uri="{FF2B5EF4-FFF2-40B4-BE49-F238E27FC236}">
-                <a16:creationId xmlns:a16="http://schemas.microsoft.com/office/drawing/2014/main" id="{B46FEB3B-0EB1-84C6-FCDE-E1E0BB6183F6}"/>
-              </a:ext>
-            </a:extLst>
-          </p:cNvPr>
-          <p:cNvSpPr>
-            <a:spLocks noGrp="1"/>
-          </p:cNvSpPr>
-          <p:nvPr>
-            <p:ph type="title"/>
-          </p:nvPr>
-        </p:nvSpPr>
-        <p:spPr/>
-        <p:txBody>
-          <a:bodyPr/>
-          <a:lstStyle/>
-          <a:p>
-            <a:r>
-              <a:rPr lang="en-US" sz="2000" b="1" dirty="0"/>
-              <a:t>if expression and lambdas</a:t>
-            </a:r>
-            <a:endParaRPr lang="en-US" dirty="0"/>
-          </a:p>
-        </p:txBody>
-      </p:sp>
-      <p:sp>
-        <p:nvSpPr>
-          <p:cNvPr id="4" name="Text Box 9">
-            <a:extLst>
-              <a:ext uri="{FF2B5EF4-FFF2-40B4-BE49-F238E27FC236}">
-                <a16:creationId xmlns:a16="http://schemas.microsoft.com/office/drawing/2014/main" id="{D2451261-021B-152E-5F8E-F45872955F4D}"/>
-              </a:ext>
-            </a:extLst>
-          </p:cNvPr>
-          <p:cNvSpPr txBox="1">
-            <a:spLocks noChangeArrowheads="1"/>
-          </p:cNvSpPr>
-          <p:nvPr/>
-        </p:nvSpPr>
-        <p:spPr bwMode="auto">
-          <a:xfrm>
-            <a:off x="273832" y="1120775"/>
-            <a:ext cx="1752600" cy="738664"/>
-          </a:xfrm>
-          <a:prstGeom prst="rect">
-            <a:avLst/>
-          </a:prstGeom>
-          <a:solidFill>
-            <a:schemeClr val="accent1"/>
-          </a:solidFill>
-          <a:ln>
-            <a:solidFill>
-              <a:schemeClr val="accent1">
-                <a:shade val="15000"/>
-              </a:schemeClr>
-            </a:solidFill>
-          </a:ln>
-          <a:effectLst/>
-        </p:spPr>
-        <p:txBody>
-          <a:bodyPr wrap="square" anchor="ctr">
-            <a:spAutoFit/>
-          </a:bodyPr>
-          <a:lstStyle/>
-          <a:p>
-            <a:r>
-              <a:rPr lang="en-IE" sz="1400" dirty="0"/>
-              <a:t>\x -&gt; \y -&gt;</a:t>
-            </a:r>
-          </a:p>
-          <a:p>
-            <a:r>
-              <a:rPr lang="en-IE" sz="1400" dirty="0"/>
-              <a:t>  </a:t>
-            </a:r>
-            <a:r>
-              <a:rPr lang="en-IE" sz="1400" b="1" dirty="0">
-                <a:solidFill>
-                  <a:schemeClr val="bg1"/>
-                </a:solidFill>
-              </a:rPr>
-              <a:t>if x &lt; y then -1</a:t>
-            </a:r>
-          </a:p>
-          <a:p>
-            <a:r>
-              <a:rPr lang="en-IE" sz="1400" b="1" dirty="0">
-                <a:solidFill>
-                  <a:schemeClr val="bg1"/>
-                </a:solidFill>
-              </a:rPr>
-              <a:t>  else 1</a:t>
-            </a:r>
-          </a:p>
-        </p:txBody>
-      </p:sp>
-      <p:sp>
-        <p:nvSpPr>
-          <p:cNvPr id="7" name="Text Box 9">
-            <a:extLst>
-              <a:ext uri="{FF2B5EF4-FFF2-40B4-BE49-F238E27FC236}">
-                <a16:creationId xmlns:a16="http://schemas.microsoft.com/office/drawing/2014/main" id="{B3851283-D0FF-9EAC-CCDA-0D2B5AAF0323}"/>
-              </a:ext>
-            </a:extLst>
-          </p:cNvPr>
-          <p:cNvSpPr txBox="1">
-            <a:spLocks noChangeArrowheads="1"/>
-          </p:cNvSpPr>
-          <p:nvPr/>
-        </p:nvSpPr>
-        <p:spPr bwMode="auto">
-          <a:xfrm>
-            <a:off x="277145" y="2345966"/>
-            <a:ext cx="2869418" cy="523220"/>
-          </a:xfrm>
-          <a:prstGeom prst="rect">
-            <a:avLst/>
-          </a:prstGeom>
-          <a:solidFill>
-            <a:schemeClr val="accent1"/>
-          </a:solidFill>
-          <a:ln>
-            <a:solidFill>
-              <a:schemeClr val="accent1">
-                <a:shade val="15000"/>
-              </a:schemeClr>
-            </a:solidFill>
-          </a:ln>
-          <a:effectLst/>
-        </p:spPr>
-        <p:txBody>
-          <a:bodyPr wrap="square" anchor="ctr">
-            <a:spAutoFit/>
-          </a:bodyPr>
-          <a:lstStyle/>
-          <a:p>
-            <a:r>
-              <a:rPr lang="en-US" sz="1400" dirty="0"/>
-              <a:t>(\x y -&gt; </a:t>
-            </a:r>
-            <a:r>
-              <a:rPr lang="en-US" sz="1400" dirty="0">
-                <a:solidFill>
-                  <a:schemeClr val="bg1"/>
-                </a:solidFill>
-              </a:rPr>
-              <a:t>if x &lt; y then -1 else 1</a:t>
-            </a:r>
-            <a:r>
-              <a:rPr lang="en-US" sz="1400" dirty="0"/>
-              <a:t>) 3 4</a:t>
-            </a:r>
-          </a:p>
-          <a:p>
-            <a:r>
-              <a:rPr lang="en-US" sz="1400" dirty="0"/>
-              <a:t>-1</a:t>
-            </a:r>
-          </a:p>
-        </p:txBody>
-      </p:sp>
-      <p:sp>
-        <p:nvSpPr>
-          <p:cNvPr id="8" name="Rectangular Callout 7">
-            <a:extLst>
-              <a:ext uri="{FF2B5EF4-FFF2-40B4-BE49-F238E27FC236}">
-                <a16:creationId xmlns:a16="http://schemas.microsoft.com/office/drawing/2014/main" id="{A3B6A080-9179-CAF3-6721-9BEAF2CA0C4E}"/>
-              </a:ext>
-            </a:extLst>
-          </p:cNvPr>
-          <p:cNvSpPr/>
-          <p:nvPr/>
-        </p:nvSpPr>
-        <p:spPr>
-          <a:xfrm>
-            <a:off x="2457450" y="1161852"/>
-            <a:ext cx="1600200" cy="545473"/>
-          </a:xfrm>
-          <a:prstGeom prst="wedgeRectCallout">
-            <a:avLst>
-              <a:gd name="adj1" fmla="val -85861"/>
-              <a:gd name="adj2" fmla="val -6275"/>
-            </a:avLst>
-          </a:prstGeom>
-          <a:solidFill>
-            <a:schemeClr val="accent4"/>
-          </a:solidFill>
-        </p:spPr>
-        <p:style>
-          <a:lnRef idx="2">
-            <a:schemeClr val="accent1">
-              <a:shade val="15000"/>
-            </a:schemeClr>
-          </a:lnRef>
-          <a:fillRef idx="1">
-            <a:schemeClr val="accent1"/>
-          </a:fillRef>
-          <a:effectRef idx="0">
-            <a:schemeClr val="accent1"/>
-          </a:effectRef>
-          <a:fontRef idx="minor">
-            <a:schemeClr val="lt1"/>
-          </a:fontRef>
-        </p:style>
-        <p:txBody>
-          <a:bodyPr rtlCol="0" anchor="ctr"/>
-          <a:lstStyle/>
-          <a:p>
-            <a:pPr algn="ctr"/>
-            <a:r>
-              <a:rPr lang="en-US" sz="1400" dirty="0"/>
-              <a:t>Definition of function</a:t>
-            </a:r>
-          </a:p>
-        </p:txBody>
-      </p:sp>
-      <p:sp>
-        <p:nvSpPr>
-          <p:cNvPr id="9" name="Rectangular Callout 8">
-            <a:extLst>
-              <a:ext uri="{FF2B5EF4-FFF2-40B4-BE49-F238E27FC236}">
-                <a16:creationId xmlns:a16="http://schemas.microsoft.com/office/drawing/2014/main" id="{88E651AF-6A4E-3822-B0CA-0436AFC94222}"/>
-              </a:ext>
-            </a:extLst>
-          </p:cNvPr>
-          <p:cNvSpPr/>
-          <p:nvPr/>
-        </p:nvSpPr>
-        <p:spPr>
-          <a:xfrm>
-            <a:off x="2944937" y="1753426"/>
-            <a:ext cx="1600200" cy="545473"/>
-          </a:xfrm>
-          <a:prstGeom prst="wedgeRectCallout">
-            <a:avLst>
-              <a:gd name="adj1" fmla="val -90002"/>
-              <a:gd name="adj2" fmla="val 53247"/>
-            </a:avLst>
-          </a:prstGeom>
-          <a:solidFill>
-            <a:schemeClr val="accent4"/>
-          </a:solidFill>
-        </p:spPr>
-        <p:style>
-          <a:lnRef idx="2">
-            <a:schemeClr val="accent1">
-              <a:shade val="15000"/>
-            </a:schemeClr>
-          </a:lnRef>
-          <a:fillRef idx="1">
-            <a:schemeClr val="accent1"/>
-          </a:fillRef>
-          <a:effectRef idx="0">
-            <a:schemeClr val="accent1"/>
-          </a:effectRef>
-          <a:fontRef idx="minor">
-            <a:schemeClr val="lt1"/>
-          </a:fontRef>
-        </p:style>
-        <p:txBody>
-          <a:bodyPr rtlCol="0" anchor="ctr"/>
-          <a:lstStyle/>
-          <a:p>
-            <a:pPr algn="ctr"/>
-            <a:r>
-              <a:rPr lang="en-US" sz="1400" dirty="0"/>
-              <a:t>Application of function</a:t>
-            </a:r>
-          </a:p>
-        </p:txBody>
-      </p:sp>
-      <p:sp>
-        <p:nvSpPr>
-          <p:cNvPr id="10" name="Slide Number Placeholder 2">
-            <a:extLst>
-              <a:ext uri="{FF2B5EF4-FFF2-40B4-BE49-F238E27FC236}">
-                <a16:creationId xmlns:a16="http://schemas.microsoft.com/office/drawing/2014/main" id="{11508B09-247B-B748-25C1-FA4F378DBD6F}"/>
-              </a:ext>
-            </a:extLst>
-          </p:cNvPr>
-          <p:cNvSpPr>
-            <a:spLocks noGrp="1"/>
-          </p:cNvSpPr>
-          <p:nvPr>
-            <p:ph type="sldNum" sz="quarter" idx="12"/>
-          </p:nvPr>
-        </p:nvSpPr>
-        <p:spPr>
-          <a:xfrm>
-            <a:off x="3957002" y="380102"/>
-            <a:ext cx="583661" cy="550444"/>
-          </a:xfrm>
-          <a:extLst>
-            <a:ext uri="{909E8E84-426E-40dd-AFC4-6F175D3DCCD1}">
-              <a14:hiddenFill xmlns="" xmlns:a14="http://schemas.microsoft.com/office/drawing/2010/main">
-                <a:solidFill>
-                  <a:srgbClr val="FFFFFF"/>
-                </a:solidFill>
-              </a14:hiddenFill>
-            </a:ext>
-            <a:ext uri="{91240B29-F687-4f45-9708-019B960494DF}">
-              <a14:hiddenLine xmlns="" xmlns:a14="http://schemas.microsoft.com/office/drawing/2010/main" w="9525">
-                <a:solidFill>
-                  <a:srgbClr val="000000"/>
-                </a:solidFill>
-                <a:miter lim="800000"/>
-                <a:headEnd/>
-                <a:tailEnd/>
-              </a14:hiddenLine>
-            </a:ext>
-          </a:extLst>
-        </p:spPr>
-        <p:txBody>
-          <a:bodyPr wrap="square" anchor="t">
-            <a:normAutofit/>
-          </a:bodyPr>
-          <a:lstStyle>
-            <a:lvl1pPr>
-              <a:defRPr sz="1412">
-                <a:solidFill>
-                  <a:schemeClr val="tx1"/>
-                </a:solidFill>
-                <a:latin typeface="Tahoma" charset="0"/>
-                <a:ea typeface="ＭＳ Ｐゴシック" charset="0"/>
-                <a:cs typeface="ＭＳ Ｐゴシック" charset="0"/>
-              </a:defRPr>
-            </a:lvl1pPr>
-            <a:lvl2pPr marL="374595" indent="-144075">
-              <a:defRPr sz="1412">
-                <a:solidFill>
-                  <a:schemeClr val="tx1"/>
-                </a:solidFill>
-                <a:latin typeface="Tahoma" charset="0"/>
-                <a:ea typeface="ＭＳ Ｐゴシック" charset="0"/>
-              </a:defRPr>
-            </a:lvl2pPr>
-            <a:lvl3pPr marL="576301" indent="-115260">
-              <a:defRPr sz="1412">
-                <a:solidFill>
-                  <a:schemeClr val="tx1"/>
-                </a:solidFill>
-                <a:latin typeface="Tahoma" charset="0"/>
-                <a:ea typeface="ＭＳ Ｐゴシック" charset="0"/>
-              </a:defRPr>
-            </a:lvl3pPr>
-            <a:lvl4pPr marL="806821" indent="-115260">
-              <a:defRPr sz="1412">
-                <a:solidFill>
-                  <a:schemeClr val="tx1"/>
-                </a:solidFill>
-                <a:latin typeface="Tahoma" charset="0"/>
-                <a:ea typeface="ＭＳ Ｐゴシック" charset="0"/>
-              </a:defRPr>
-            </a:lvl4pPr>
-            <a:lvl5pPr marL="1037341" indent="-115260">
-              <a:defRPr sz="1412">
-                <a:solidFill>
-                  <a:schemeClr val="tx1"/>
-                </a:solidFill>
-                <a:latin typeface="Tahoma" charset="0"/>
-                <a:ea typeface="ＭＳ Ｐゴシック" charset="0"/>
-              </a:defRPr>
-            </a:lvl5pPr>
-            <a:lvl6pPr marL="1267861" indent="-115260" eaLnBrk="0" fontAlgn="base" hangingPunct="0">
-              <a:spcBef>
-                <a:spcPct val="0"/>
-              </a:spcBef>
-              <a:spcAft>
-                <a:spcPct val="0"/>
-              </a:spcAft>
-              <a:defRPr sz="1412">
-                <a:solidFill>
-                  <a:schemeClr val="tx1"/>
-                </a:solidFill>
-                <a:latin typeface="Tahoma" charset="0"/>
-                <a:ea typeface="ＭＳ Ｐゴシック" charset="0"/>
-              </a:defRPr>
-            </a:lvl6pPr>
-            <a:lvl7pPr marL="1498382" indent="-115260" eaLnBrk="0" fontAlgn="base" hangingPunct="0">
-              <a:spcBef>
-                <a:spcPct val="0"/>
-              </a:spcBef>
-              <a:spcAft>
-                <a:spcPct val="0"/>
-              </a:spcAft>
-              <a:defRPr sz="1412">
-                <a:solidFill>
-                  <a:schemeClr val="tx1"/>
-                </a:solidFill>
-                <a:latin typeface="Tahoma" charset="0"/>
-                <a:ea typeface="ＭＳ Ｐゴシック" charset="0"/>
-              </a:defRPr>
-            </a:lvl7pPr>
-            <a:lvl8pPr marL="1728902" indent="-115260" eaLnBrk="0" fontAlgn="base" hangingPunct="0">
-              <a:spcBef>
-                <a:spcPct val="0"/>
-              </a:spcBef>
-              <a:spcAft>
-                <a:spcPct val="0"/>
-              </a:spcAft>
-              <a:defRPr sz="1412">
-                <a:solidFill>
-                  <a:schemeClr val="tx1"/>
-                </a:solidFill>
-                <a:latin typeface="Tahoma" charset="0"/>
-                <a:ea typeface="ＭＳ Ｐゴシック" charset="0"/>
-              </a:defRPr>
-            </a:lvl8pPr>
-            <a:lvl9pPr marL="1959422" indent="-115260" eaLnBrk="0" fontAlgn="base" hangingPunct="0">
-              <a:spcBef>
-                <a:spcPct val="0"/>
-              </a:spcBef>
-              <a:spcAft>
-                <a:spcPct val="0"/>
-              </a:spcAft>
-              <a:defRPr sz="1412">
-                <a:solidFill>
-                  <a:schemeClr val="tx1"/>
-                </a:solidFill>
-                <a:latin typeface="Tahoma" charset="0"/>
-                <a:ea typeface="ＭＳ Ｐゴシック" charset="0"/>
-              </a:defRPr>
-            </a:lvl9pPr>
-          </a:lstStyle>
-          <a:p>
-            <a:pPr>
-              <a:spcAft>
-                <a:spcPts val="303"/>
-              </a:spcAft>
-            </a:pPr>
-            <a:fld id="{CC73A6B6-49ED-C641-8D95-0A84FA800C15}" type="slidenum">
-              <a:rPr lang="en-US" sz="706"/>
-              <a:pPr>
-                <a:spcAft>
-                  <a:spcPts val="303"/>
-                </a:spcAft>
-              </a:pPr>
-              <a:t>11</a:t>
-            </a:fld>
-            <a:endParaRPr lang="en-US" sz="706" dirty="0"/>
-          </a:p>
-        </p:txBody>
-      </p:sp>
-    </p:spTree>
-    <p:extLst>
-      <p:ext uri="{BB962C8B-B14F-4D97-AF65-F5344CB8AC3E}">
-        <p14:creationId xmlns:p14="http://schemas.microsoft.com/office/powerpoint/2010/main" val="1496491430"/>
-      </p:ext>
-    </p:extLst>
-  </p:cSld>
-  <p:clrMapOvr>
-    <a:masterClrMapping/>
-  </p:clrMapOvr>
-  <p:timing>
-    <p:tnLst>
-      <p:par>
-        <p:cTn id="1" dur="indefinite" restart="never" nodeType="tmRoot">
-          <p:childTnLst>
-            <p:seq concurrent="1" nextAc="seek">
-              <p:cTn id="2" dur="indefinite" nodeType="mainSeq">
-                <p:childTnLst>
-                  <p:par>
-                    <p:cTn id="3" fill="hold">
-                      <p:stCondLst>
-                        <p:cond delay="indefinite"/>
-                      </p:stCondLst>
-                      <p:childTnLst>
-                        <p:par>
-                          <p:cTn id="4" fill="hold">
-                            <p:stCondLst>
-                              <p:cond delay="0"/>
-                            </p:stCondLst>
-                            <p:childTnLst>
-                              <p:par>
-                                <p:cTn id="5" presetID="2" presetClass="entr" presetSubtype="4" fill="hold" grpId="0" nodeType="clickEffect">
-                                  <p:stCondLst>
-                                    <p:cond delay="0"/>
-                                  </p:stCondLst>
-                                  <p:childTnLst>
-                                    <p:set>
-                                      <p:cBhvr>
-                                        <p:cTn id="6" dur="1" fill="hold">
-                                          <p:stCondLst>
-                                            <p:cond delay="0"/>
-                                          </p:stCondLst>
-                                        </p:cTn>
-                                        <p:tgtEl>
-                                          <p:spTgt spid="4"/>
-                                        </p:tgtEl>
-                                        <p:attrNameLst>
-                                          <p:attrName>style.visibility</p:attrName>
-                                        </p:attrNameLst>
-                                      </p:cBhvr>
-                                      <p:to>
-                                        <p:strVal val="visible"/>
-                                      </p:to>
-                                    </p:set>
-                                    <p:anim calcmode="lin" valueType="num">
-                                      <p:cBhvr additive="base">
-                                        <p:cTn id="7" dur="500" fill="hold"/>
-                                        <p:tgtEl>
-                                          <p:spTgt spid="4"/>
-                                        </p:tgtEl>
-                                        <p:attrNameLst>
-                                          <p:attrName>ppt_x</p:attrName>
-                                        </p:attrNameLst>
-                                      </p:cBhvr>
-                                      <p:tavLst>
-                                        <p:tav tm="0">
-                                          <p:val>
-                                            <p:strVal val="#ppt_x"/>
-                                          </p:val>
-                                        </p:tav>
-                                        <p:tav tm="100000">
-                                          <p:val>
-                                            <p:strVal val="#ppt_x"/>
-                                          </p:val>
-                                        </p:tav>
-                                      </p:tavLst>
-                                    </p:anim>
-                                    <p:anim calcmode="lin" valueType="num">
-                                      <p:cBhvr additive="base">
-                                        <p:cTn id="8" dur="500" fill="hold"/>
-                                        <p:tgtEl>
-                                          <p:spTgt spid="4"/>
-                                        </p:tgtEl>
-                                        <p:attrNameLst>
-                                          <p:attrName>ppt_y</p:attrName>
-                                        </p:attrNameLst>
-                                      </p:cBhvr>
-                                      <p:tavLst>
-                                        <p:tav tm="0">
-                                          <p:val>
-                                            <p:strVal val="1+#ppt_h/2"/>
-                                          </p:val>
-                                        </p:tav>
-                                        <p:tav tm="100000">
-                                          <p:val>
-                                            <p:strVal val="#ppt_y"/>
-                                          </p:val>
-                                        </p:tav>
-                                      </p:tavLst>
-                                    </p:anim>
-                                  </p:childTnLst>
-                                </p:cTn>
-                              </p:par>
-                              <p:par>
-                                <p:cTn id="9" presetID="2" presetClass="entr" presetSubtype="4" fill="hold" grpId="0" nodeType="withEffect">
-                                  <p:stCondLst>
-                                    <p:cond delay="0"/>
-                                  </p:stCondLst>
-                                  <p:childTnLst>
-                                    <p:set>
-                                      <p:cBhvr>
-                                        <p:cTn id="10" dur="1" fill="hold">
-                                          <p:stCondLst>
-                                            <p:cond delay="0"/>
-                                          </p:stCondLst>
-                                        </p:cTn>
-                                        <p:tgtEl>
-                                          <p:spTgt spid="8"/>
-                                        </p:tgtEl>
-                                        <p:attrNameLst>
-                                          <p:attrName>style.visibility</p:attrName>
-                                        </p:attrNameLst>
-                                      </p:cBhvr>
-                                      <p:to>
-                                        <p:strVal val="visible"/>
-                                      </p:to>
-                                    </p:set>
-                                    <p:anim calcmode="lin" valueType="num">
-                                      <p:cBhvr additive="base">
-                                        <p:cTn id="11" dur="500" fill="hold"/>
-                                        <p:tgtEl>
-                                          <p:spTgt spid="8"/>
-                                        </p:tgtEl>
-                                        <p:attrNameLst>
-                                          <p:attrName>ppt_x</p:attrName>
-                                        </p:attrNameLst>
-                                      </p:cBhvr>
-                                      <p:tavLst>
-                                        <p:tav tm="0">
-                                          <p:val>
-                                            <p:strVal val="#ppt_x"/>
-                                          </p:val>
-                                        </p:tav>
-                                        <p:tav tm="100000">
-                                          <p:val>
-                                            <p:strVal val="#ppt_x"/>
-                                          </p:val>
-                                        </p:tav>
-                                      </p:tavLst>
-                                    </p:anim>
-                                    <p:anim calcmode="lin" valueType="num">
-                                      <p:cBhvr additive="base">
-                                        <p:cTn id="12" dur="500" fill="hold"/>
-                                        <p:tgtEl>
-                                          <p:spTgt spid="8"/>
-                                        </p:tgtEl>
-                                        <p:attrNameLst>
-                                          <p:attrName>ppt_y</p:attrName>
-                                        </p:attrNameLst>
-                                      </p:cBhvr>
-                                      <p:tavLst>
-                                        <p:tav tm="0">
-                                          <p:val>
-                                            <p:strVal val="1+#ppt_h/2"/>
-                                          </p:val>
-                                        </p:tav>
-                                        <p:tav tm="100000">
-                                          <p:val>
-                                            <p:strVal val="#ppt_y"/>
-                                          </p:val>
-                                        </p:tav>
-                                      </p:tavLst>
-                                    </p:anim>
-                                  </p:childTnLst>
-                                </p:cTn>
-                              </p:par>
-                            </p:childTnLst>
-                          </p:cTn>
-                        </p:par>
-                      </p:childTnLst>
-                    </p:cTn>
-                  </p:par>
-                  <p:par>
-                    <p:cTn id="13" fill="hold">
-                      <p:stCondLst>
-                        <p:cond delay="indefinite"/>
-                      </p:stCondLst>
-                      <p:childTnLst>
-                        <p:par>
-                          <p:cTn id="14" fill="hold">
-                            <p:stCondLst>
-                              <p:cond delay="0"/>
-                            </p:stCondLst>
-                            <p:childTnLst>
-                              <p:par>
-                                <p:cTn id="15" presetID="2" presetClass="entr" presetSubtype="4" fill="hold" grpId="0" nodeType="clickEffect">
-                                  <p:stCondLst>
-                                    <p:cond delay="0"/>
-                                  </p:stCondLst>
-                                  <p:childTnLst>
-                                    <p:set>
-                                      <p:cBhvr>
-                                        <p:cTn id="16" dur="1" fill="hold">
-                                          <p:stCondLst>
-                                            <p:cond delay="0"/>
-                                          </p:stCondLst>
-                                        </p:cTn>
-                                        <p:tgtEl>
-                                          <p:spTgt spid="7"/>
-                                        </p:tgtEl>
-                                        <p:attrNameLst>
-                                          <p:attrName>style.visibility</p:attrName>
-                                        </p:attrNameLst>
-                                      </p:cBhvr>
-                                      <p:to>
-                                        <p:strVal val="visible"/>
-                                      </p:to>
-                                    </p:set>
-                                    <p:anim calcmode="lin" valueType="num">
-                                      <p:cBhvr additive="base">
-                                        <p:cTn id="17" dur="500" fill="hold"/>
-                                        <p:tgtEl>
-                                          <p:spTgt spid="7"/>
-                                        </p:tgtEl>
-                                        <p:attrNameLst>
-                                          <p:attrName>ppt_x</p:attrName>
-                                        </p:attrNameLst>
-                                      </p:cBhvr>
-                                      <p:tavLst>
-                                        <p:tav tm="0">
-                                          <p:val>
-                                            <p:strVal val="#ppt_x"/>
-                                          </p:val>
-                                        </p:tav>
-                                        <p:tav tm="100000">
-                                          <p:val>
-                                            <p:strVal val="#ppt_x"/>
-                                          </p:val>
-                                        </p:tav>
-                                      </p:tavLst>
-                                    </p:anim>
-                                    <p:anim calcmode="lin" valueType="num">
-                                      <p:cBhvr additive="base">
-                                        <p:cTn id="18" dur="500" fill="hold"/>
-                                        <p:tgtEl>
-                                          <p:spTgt spid="7"/>
-                                        </p:tgtEl>
-                                        <p:attrNameLst>
-                                          <p:attrName>ppt_y</p:attrName>
-                                        </p:attrNameLst>
-                                      </p:cBhvr>
-                                      <p:tavLst>
-                                        <p:tav tm="0">
-                                          <p:val>
-                                            <p:strVal val="1+#ppt_h/2"/>
-                                          </p:val>
-                                        </p:tav>
-                                        <p:tav tm="100000">
-                                          <p:val>
-                                            <p:strVal val="#ppt_y"/>
-                                          </p:val>
-                                        </p:tav>
-                                      </p:tavLst>
-                                    </p:anim>
-                                  </p:childTnLst>
-                                </p:cTn>
-                              </p:par>
-                              <p:par>
-                                <p:cTn id="19" presetID="2" presetClass="entr" presetSubtype="4" fill="hold" grpId="0" nodeType="withEffect">
-                                  <p:stCondLst>
-                                    <p:cond delay="0"/>
-                                  </p:stCondLst>
-                                  <p:childTnLst>
-                                    <p:set>
-                                      <p:cBhvr>
-                                        <p:cTn id="20" dur="1" fill="hold">
-                                          <p:stCondLst>
-                                            <p:cond delay="0"/>
-                                          </p:stCondLst>
-                                        </p:cTn>
-                                        <p:tgtEl>
-                                          <p:spTgt spid="9"/>
-                                        </p:tgtEl>
-                                        <p:attrNameLst>
-                                          <p:attrName>style.visibility</p:attrName>
-                                        </p:attrNameLst>
-                                      </p:cBhvr>
-                                      <p:to>
-                                        <p:strVal val="visible"/>
-                                      </p:to>
-                                    </p:set>
-                                    <p:anim calcmode="lin" valueType="num">
-                                      <p:cBhvr additive="base">
-                                        <p:cTn id="21" dur="500" fill="hold"/>
-                                        <p:tgtEl>
-                                          <p:spTgt spid="9"/>
-                                        </p:tgtEl>
-                                        <p:attrNameLst>
-                                          <p:attrName>ppt_x</p:attrName>
-                                        </p:attrNameLst>
-                                      </p:cBhvr>
-                                      <p:tavLst>
-                                        <p:tav tm="0">
-                                          <p:val>
-                                            <p:strVal val="#ppt_x"/>
-                                          </p:val>
-                                        </p:tav>
-                                        <p:tav tm="100000">
-                                          <p:val>
-                                            <p:strVal val="#ppt_x"/>
-                                          </p:val>
-                                        </p:tav>
-                                      </p:tavLst>
-                                    </p:anim>
-                                    <p:anim calcmode="lin" valueType="num">
-                                      <p:cBhvr additive="base">
-                                        <p:cTn id="22" dur="500" fill="hold"/>
-                                        <p:tgtEl>
-                                          <p:spTgt spid="9"/>
-                                        </p:tgtEl>
-                                        <p:attrNameLst>
-                                          <p:attrName>ppt_y</p:attrName>
-                                        </p:attrNameLst>
-                                      </p:cBhvr>
-                                      <p:tavLst>
-                                        <p:tav tm="0">
-                                          <p:val>
-                                            <p:strVal val="1+#ppt_h/2"/>
-                                          </p:val>
-                                        </p:tav>
-                                        <p:tav tm="100000">
-                                          <p:val>
-                                            <p:strVal val="#ppt_y"/>
-                                          </p:val>
-                                        </p:tav>
-                                      </p:tavLst>
-                                    </p:anim>
-                                  </p:childTnLst>
-                                </p:cTn>
-                              </p:par>
-                            </p:childTnLst>
-                          </p:cTn>
-                        </p:par>
-                      </p:childTnLst>
-                    </p:cTn>
-                  </p:par>
-                </p:childTnLst>
-              </p:cTn>
-              <p:prevCondLst>
-                <p:cond evt="onPrev" delay="0">
-                  <p:tgtEl>
-                    <p:sldTgt/>
-                  </p:tgtEl>
-                </p:cond>
-              </p:prevCondLst>
-              <p:nextCondLst>
-                <p:cond evt="onNext" delay="0">
-                  <p:tgtEl>
-                    <p:sldTgt/>
-                  </p:tgtEl>
-                </p:cond>
-              </p:nextCondLst>
-            </p:seq>
-          </p:childTnLst>
-        </p:cTn>
-      </p:par>
-    </p:tnLst>
-    <p:bldLst>
-      <p:bldP spid="4" grpId="0" animBg="1"/>
-      <p:bldP spid="7" grpId="0" animBg="1"/>
-      <p:bldP spid="8" grpId="0" animBg="1"/>
-      <p:bldP spid="9" grpId="0" animBg="1"/>
-    </p:bldLst>
-  </p:timing>
-</p:sld>
-</file>
-
-<file path=ppt/slides/slide12.xml><?xml version="1.0" encoding="utf-8"?>
-<p:sld xmlns:a="http://schemas.openxmlformats.org/drawingml/2006/main" xmlns:r="http://schemas.openxmlformats.org/officeDocument/2006/relationships" xmlns:p="http://schemas.openxmlformats.org/presentationml/2006/main">
-  <p:cSld>
-    <p:spTree>
-      <p:nvGrpSpPr>
-        <p:cNvPr id="1" name=""/>
-        <p:cNvGrpSpPr/>
-        <p:nvPr/>
-      </p:nvGrpSpPr>
-      <p:grpSpPr>
-        <a:xfrm>
-          <a:off x="0" y="0"/>
-          <a:ext cx="0" cy="0"/>
-          <a:chOff x="0" y="0"/>
-          <a:chExt cx="0" cy="0"/>
-        </a:xfrm>
-      </p:grpSpPr>
-      <p:sp>
-        <p:nvSpPr>
-          <p:cNvPr id="4" name="Title 1">
-            <a:extLst>
-              <a:ext uri="{FF2B5EF4-FFF2-40B4-BE49-F238E27FC236}">
-                <a16:creationId xmlns:a16="http://schemas.microsoft.com/office/drawing/2014/main" id="{017D84B5-FF47-E9C2-FDE8-4932BBFD3022}"/>
-              </a:ext>
-            </a:extLst>
-          </p:cNvPr>
-          <p:cNvSpPr>
-            <a:spLocks noGrp="1"/>
-          </p:cNvSpPr>
-          <p:nvPr>
-            <p:ph type="title"/>
-          </p:nvPr>
-        </p:nvSpPr>
-        <p:spPr/>
-        <p:txBody>
-          <a:bodyPr/>
-          <a:lstStyle/>
-          <a:p>
-            <a:r>
-              <a:rPr lang="en-US" sz="2000" b="1" dirty="0"/>
-              <a:t>if expression and lambdas</a:t>
-            </a:r>
-            <a:endParaRPr lang="en-US" dirty="0"/>
-          </a:p>
-        </p:txBody>
-      </p:sp>
-      <p:sp>
-        <p:nvSpPr>
-          <p:cNvPr id="6" name="TextBox 5">
-            <a:extLst>
-              <a:ext uri="{FF2B5EF4-FFF2-40B4-BE49-F238E27FC236}">
-                <a16:creationId xmlns:a16="http://schemas.microsoft.com/office/drawing/2014/main" id="{207BFC10-6ED4-1F9D-60A4-4F8996BC1387}"/>
-              </a:ext>
-            </a:extLst>
-          </p:cNvPr>
-          <p:cNvSpPr txBox="1"/>
-          <p:nvPr/>
-        </p:nvSpPr>
-        <p:spPr>
-          <a:xfrm>
-            <a:off x="850524" y="1120775"/>
-            <a:ext cx="2309190" cy="2092881"/>
-          </a:xfrm>
-          <a:prstGeom prst="rect">
-            <a:avLst/>
-          </a:prstGeom>
-          <a:solidFill>
-            <a:schemeClr val="accent4"/>
-          </a:solidFill>
-          <a:ln>
-            <a:solidFill>
-              <a:schemeClr val="accent1">
-                <a:shade val="15000"/>
-              </a:schemeClr>
-            </a:solidFill>
-          </a:ln>
-        </p:spPr>
-        <p:txBody>
-          <a:bodyPr wrap="square">
-            <a:spAutoFit/>
-          </a:bodyPr>
-          <a:lstStyle/>
-          <a:p>
-            <a:r>
-              <a:rPr lang="en-US" sz="1000" dirty="0"/>
-              <a:t>(</a:t>
-            </a:r>
-            <a:r>
-              <a:rPr lang="en-US" sz="1000" dirty="0" err="1"/>
-              <a:t>λx.λy.body</a:t>
-            </a:r>
-            <a:r>
-              <a:rPr lang="en-US" sz="1000" dirty="0"/>
-              <a:t>) 3 4</a:t>
-            </a:r>
-          </a:p>
-          <a:p>
-            <a:r>
-              <a:rPr lang="en-US" sz="1000" dirty="0"/>
-              <a:t>      │</a:t>
-            </a:r>
-          </a:p>
-          <a:p>
-            <a:r>
-              <a:rPr lang="en-US" sz="1000" dirty="0"/>
-              <a:t>      │ β-reduce (x := 3)</a:t>
-            </a:r>
-          </a:p>
-          <a:p>
-            <a:r>
-              <a:rPr lang="en-US" sz="1000" dirty="0"/>
-              <a:t>      ▼</a:t>
-            </a:r>
-          </a:p>
-          <a:p>
-            <a:r>
-              <a:rPr lang="en-US" sz="1000" dirty="0"/>
-              <a:t>   </a:t>
-            </a:r>
-            <a:r>
-              <a:rPr lang="en-US" sz="1000" dirty="0" err="1"/>
-              <a:t>λy.body</a:t>
-            </a:r>
-            <a:r>
-              <a:rPr lang="en-US" sz="1000" dirty="0"/>
-              <a:t>[x := 3]</a:t>
-            </a:r>
-          </a:p>
-          <a:p>
-            <a:r>
-              <a:rPr lang="en-US" sz="1000" dirty="0"/>
-              <a:t>      │</a:t>
-            </a:r>
-          </a:p>
-          <a:p>
-            <a:r>
-              <a:rPr lang="en-US" sz="1000" dirty="0"/>
-              <a:t>      │ β-reduce (y := 4)</a:t>
-            </a:r>
-          </a:p>
-          <a:p>
-            <a:r>
-              <a:rPr lang="en-US" sz="1000" dirty="0"/>
-              <a:t>      ▼</a:t>
-            </a:r>
-          </a:p>
-          <a:p>
-            <a:r>
-              <a:rPr lang="en-US" sz="1000" dirty="0"/>
-              <a:t>   body[x := 3, y := 4]</a:t>
-            </a:r>
-          </a:p>
-          <a:p>
-            <a:r>
-              <a:rPr lang="en-US" sz="1000" dirty="0"/>
-              <a:t>      │</a:t>
-            </a:r>
-          </a:p>
-          <a:p>
-            <a:r>
-              <a:rPr lang="en-US" sz="1000" dirty="0"/>
-              <a:t>      │ evaluate if-expression</a:t>
-            </a:r>
-          </a:p>
-          <a:p>
-            <a:r>
-              <a:rPr lang="en-US" sz="1000" dirty="0"/>
-              <a:t>      ▼</a:t>
-            </a:r>
-          </a:p>
-          <a:p>
-            <a:r>
-              <a:rPr lang="en-US" sz="1000" dirty="0"/>
-              <a:t>     value</a:t>
-            </a:r>
-          </a:p>
-        </p:txBody>
-      </p:sp>
-      <p:sp>
-        <p:nvSpPr>
-          <p:cNvPr id="7" name="Slide Number Placeholder 2">
-            <a:extLst>
-              <a:ext uri="{FF2B5EF4-FFF2-40B4-BE49-F238E27FC236}">
-                <a16:creationId xmlns:a16="http://schemas.microsoft.com/office/drawing/2014/main" id="{E82B8A4D-7332-C48F-5B5C-D97064A52B94}"/>
-              </a:ext>
-            </a:extLst>
-          </p:cNvPr>
-          <p:cNvSpPr>
-            <a:spLocks noGrp="1"/>
-          </p:cNvSpPr>
-          <p:nvPr>
-            <p:ph type="sldNum" sz="quarter" idx="12"/>
-          </p:nvPr>
-        </p:nvSpPr>
-        <p:spPr>
-          <a:xfrm>
-            <a:off x="3957002" y="380102"/>
-            <a:ext cx="583661" cy="550444"/>
-          </a:xfrm>
-          <a:extLst>
-            <a:ext uri="{909E8E84-426E-40dd-AFC4-6F175D3DCCD1}">
-              <a14:hiddenFill xmlns="" xmlns:a14="http://schemas.microsoft.com/office/drawing/2010/main">
-                <a:solidFill>
-                  <a:srgbClr val="FFFFFF"/>
-                </a:solidFill>
-              </a14:hiddenFill>
-            </a:ext>
-            <a:ext uri="{91240B29-F687-4f45-9708-019B960494DF}">
-              <a14:hiddenLine xmlns="" xmlns:a14="http://schemas.microsoft.com/office/drawing/2010/main" w="9525">
-                <a:solidFill>
-                  <a:srgbClr val="000000"/>
-                </a:solidFill>
-                <a:miter lim="800000"/>
-                <a:headEnd/>
-                <a:tailEnd/>
-              </a14:hiddenLine>
-            </a:ext>
-          </a:extLst>
-        </p:spPr>
-        <p:txBody>
-          <a:bodyPr wrap="square" anchor="t">
-            <a:normAutofit/>
-          </a:bodyPr>
-          <a:lstStyle>
-            <a:lvl1pPr>
-              <a:defRPr sz="1412">
-                <a:solidFill>
-                  <a:schemeClr val="tx1"/>
-                </a:solidFill>
-                <a:latin typeface="Tahoma" charset="0"/>
-                <a:ea typeface="ＭＳ Ｐゴシック" charset="0"/>
-                <a:cs typeface="ＭＳ Ｐゴシック" charset="0"/>
-              </a:defRPr>
-            </a:lvl1pPr>
-            <a:lvl2pPr marL="374595" indent="-144075">
-              <a:defRPr sz="1412">
-                <a:solidFill>
-                  <a:schemeClr val="tx1"/>
-                </a:solidFill>
-                <a:latin typeface="Tahoma" charset="0"/>
-                <a:ea typeface="ＭＳ Ｐゴシック" charset="0"/>
-              </a:defRPr>
-            </a:lvl2pPr>
-            <a:lvl3pPr marL="576301" indent="-115260">
-              <a:defRPr sz="1412">
-                <a:solidFill>
-                  <a:schemeClr val="tx1"/>
-                </a:solidFill>
-                <a:latin typeface="Tahoma" charset="0"/>
-                <a:ea typeface="ＭＳ Ｐゴシック" charset="0"/>
-              </a:defRPr>
-            </a:lvl3pPr>
-            <a:lvl4pPr marL="806821" indent="-115260">
-              <a:defRPr sz="1412">
-                <a:solidFill>
-                  <a:schemeClr val="tx1"/>
-                </a:solidFill>
-                <a:latin typeface="Tahoma" charset="0"/>
-                <a:ea typeface="ＭＳ Ｐゴシック" charset="0"/>
-              </a:defRPr>
-            </a:lvl4pPr>
-            <a:lvl5pPr marL="1037341" indent="-115260">
-              <a:defRPr sz="1412">
-                <a:solidFill>
-                  <a:schemeClr val="tx1"/>
-                </a:solidFill>
-                <a:latin typeface="Tahoma" charset="0"/>
-                <a:ea typeface="ＭＳ Ｐゴシック" charset="0"/>
-              </a:defRPr>
-            </a:lvl5pPr>
-            <a:lvl6pPr marL="1267861" indent="-115260" eaLnBrk="0" fontAlgn="base" hangingPunct="0">
-              <a:spcBef>
-                <a:spcPct val="0"/>
-              </a:spcBef>
-              <a:spcAft>
-                <a:spcPct val="0"/>
-              </a:spcAft>
-              <a:defRPr sz="1412">
-                <a:solidFill>
-                  <a:schemeClr val="tx1"/>
-                </a:solidFill>
-                <a:latin typeface="Tahoma" charset="0"/>
-                <a:ea typeface="ＭＳ Ｐゴシック" charset="0"/>
-              </a:defRPr>
-            </a:lvl6pPr>
-            <a:lvl7pPr marL="1498382" indent="-115260" eaLnBrk="0" fontAlgn="base" hangingPunct="0">
-              <a:spcBef>
-                <a:spcPct val="0"/>
-              </a:spcBef>
-              <a:spcAft>
-                <a:spcPct val="0"/>
-              </a:spcAft>
-              <a:defRPr sz="1412">
-                <a:solidFill>
-                  <a:schemeClr val="tx1"/>
-                </a:solidFill>
-                <a:latin typeface="Tahoma" charset="0"/>
-                <a:ea typeface="ＭＳ Ｐゴシック" charset="0"/>
-              </a:defRPr>
-            </a:lvl7pPr>
-            <a:lvl8pPr marL="1728902" indent="-115260" eaLnBrk="0" fontAlgn="base" hangingPunct="0">
-              <a:spcBef>
-                <a:spcPct val="0"/>
-              </a:spcBef>
-              <a:spcAft>
-                <a:spcPct val="0"/>
-              </a:spcAft>
-              <a:defRPr sz="1412">
-                <a:solidFill>
-                  <a:schemeClr val="tx1"/>
-                </a:solidFill>
-                <a:latin typeface="Tahoma" charset="0"/>
-                <a:ea typeface="ＭＳ Ｐゴシック" charset="0"/>
-              </a:defRPr>
-            </a:lvl8pPr>
-            <a:lvl9pPr marL="1959422" indent="-115260" eaLnBrk="0" fontAlgn="base" hangingPunct="0">
-              <a:spcBef>
-                <a:spcPct val="0"/>
-              </a:spcBef>
-              <a:spcAft>
-                <a:spcPct val="0"/>
-              </a:spcAft>
-              <a:defRPr sz="1412">
-                <a:solidFill>
-                  <a:schemeClr val="tx1"/>
-                </a:solidFill>
-                <a:latin typeface="Tahoma" charset="0"/>
-                <a:ea typeface="ＭＳ Ｐゴシック" charset="0"/>
-              </a:defRPr>
-            </a:lvl9pPr>
-          </a:lstStyle>
-          <a:p>
-            <a:pPr>
-              <a:spcAft>
-                <a:spcPts val="303"/>
-              </a:spcAft>
-            </a:pPr>
-            <a:fld id="{CC73A6B6-49ED-C641-8D95-0A84FA800C15}" type="slidenum">
-              <a:rPr lang="en-US" sz="706"/>
-              <a:pPr>
-                <a:spcAft>
-                  <a:spcPts val="303"/>
-                </a:spcAft>
-              </a:pPr>
-              <a:t>12</a:t>
-            </a:fld>
-            <a:endParaRPr lang="en-US" sz="706" dirty="0"/>
-          </a:p>
-        </p:txBody>
-      </p:sp>
-    </p:spTree>
-    <p:extLst>
-      <p:ext uri="{BB962C8B-B14F-4D97-AF65-F5344CB8AC3E}">
-        <p14:creationId xmlns:p14="http://schemas.microsoft.com/office/powerpoint/2010/main" val="2930759261"/>
-      </p:ext>
-    </p:extLst>
-  </p:cSld>
-  <p:clrMapOvr>
-    <a:masterClrMapping/>
-  </p:clrMapOvr>
-</p:sld>
-</file>
-
-<file path=ppt/slides/slide13.xml><?xml version="1.0" encoding="utf-8"?>
 <p:sld xmlns:a="http://schemas.openxmlformats.org/drawingml/2006/main" xmlns:r="http://schemas.openxmlformats.org/officeDocument/2006/relationships" xmlns:p="http://schemas.openxmlformats.org/presentationml/2006/main">
   <p:cSld>
     <p:spTree>
@@ -12345,14 +10596,14 @@
           </a:xfrm>
           <a:extLst>
             <a:ext uri="{909E8E84-426E-40dd-AFC4-6F175D3DCCD1}">
-              <a14:hiddenFill xmlns="" xmlns:a14="http://schemas.microsoft.com/office/drawing/2010/main">
+              <a14:hiddenFill xmlns:a14="http://schemas.microsoft.com/office/drawing/2010/main" xmlns="">
                 <a:solidFill>
                   <a:srgbClr val="FFFFFF"/>
                 </a:solidFill>
               </a14:hiddenFill>
             </a:ext>
             <a:ext uri="{91240B29-F687-4f45-9708-019B960494DF}">
-              <a14:hiddenLine xmlns="" xmlns:a14="http://schemas.microsoft.com/office/drawing/2010/main" w="9525">
+              <a14:hiddenLine xmlns:a14="http://schemas.microsoft.com/office/drawing/2010/main" xmlns="" w="9525">
                 <a:solidFill>
                   <a:srgbClr val="000000"/>
                 </a:solidFill>
@@ -12488,7 +10739,7 @@
                   <a:spcPts val="303"/>
                 </a:spcAft>
               </a:pPr>
-              <a:t>13</a:t>
+              <a:t>10</a:t>
             </a:fld>
             <a:endParaRPr lang="en-US" sz="706" dirty="0"/>
           </a:p>
@@ -13202,7 +11453,7 @@
 </p:sld>
 </file>
 
-<file path=ppt/slides/slide14.xml><?xml version="1.0" encoding="utf-8"?>
+<file path=ppt/slides/slide11.xml><?xml version="1.0" encoding="utf-8"?>
 <p:sld xmlns:a="http://schemas.openxmlformats.org/drawingml/2006/main" xmlns:r="http://schemas.openxmlformats.org/officeDocument/2006/relationships" xmlns:p="http://schemas.openxmlformats.org/presentationml/2006/main">
   <p:cSld>
     <p:spTree>
@@ -14596,14 +12847,14 @@
           </a:xfrm>
           <a:extLst>
             <a:ext uri="{909E8E84-426E-40dd-AFC4-6F175D3DCCD1}">
-              <a14:hiddenFill xmlns="" xmlns:a14="http://schemas.microsoft.com/office/drawing/2010/main">
+              <a14:hiddenFill xmlns:a14="http://schemas.microsoft.com/office/drawing/2010/main" xmlns="">
                 <a:solidFill>
                   <a:srgbClr val="FFFFFF"/>
                 </a:solidFill>
               </a14:hiddenFill>
             </a:ext>
             <a:ext uri="{91240B29-F687-4f45-9708-019B960494DF}">
-              <a14:hiddenLine xmlns="" xmlns:a14="http://schemas.microsoft.com/office/drawing/2010/main" w="9525">
+              <a14:hiddenLine xmlns:a14="http://schemas.microsoft.com/office/drawing/2010/main" xmlns="" w="9525">
                 <a:solidFill>
                   <a:srgbClr val="000000"/>
                 </a:solidFill>
@@ -14739,7 +12990,7 @@
                   <a:spcPts val="303"/>
                 </a:spcAft>
               </a:pPr>
-              <a:t>14</a:t>
+              <a:t>11</a:t>
             </a:fld>
             <a:endParaRPr lang="en-US" sz="706" dirty="0"/>
           </a:p>
@@ -15301,7 +13552,7 @@
 </p:sld>
 </file>
 
-<file path=ppt/slides/slide15.xml><?xml version="1.0" encoding="utf-8"?>
+<file path=ppt/slides/slide12.xml><?xml version="1.0" encoding="utf-8"?>
 <p:sld xmlns:a="http://schemas.openxmlformats.org/drawingml/2006/main" xmlns:r="http://schemas.openxmlformats.org/officeDocument/2006/relationships" xmlns:p="http://schemas.openxmlformats.org/presentationml/2006/main">
   <p:cSld>
     <p:spTree>
@@ -15915,14 +14166,14 @@
           </a:xfrm>
           <a:extLst>
             <a:ext uri="{909E8E84-426E-40dd-AFC4-6F175D3DCCD1}">
-              <a14:hiddenFill xmlns="" xmlns:a14="http://schemas.microsoft.com/office/drawing/2010/main">
+              <a14:hiddenFill xmlns:a14="http://schemas.microsoft.com/office/drawing/2010/main" xmlns="">
                 <a:solidFill>
                   <a:srgbClr val="FFFFFF"/>
                 </a:solidFill>
               </a14:hiddenFill>
             </a:ext>
             <a:ext uri="{91240B29-F687-4f45-9708-019B960494DF}">
-              <a14:hiddenLine xmlns="" xmlns:a14="http://schemas.microsoft.com/office/drawing/2010/main" w="9525">
+              <a14:hiddenLine xmlns:a14="http://schemas.microsoft.com/office/drawing/2010/main" xmlns="" w="9525">
                 <a:solidFill>
                   <a:srgbClr val="000000"/>
                 </a:solidFill>
@@ -16058,7 +14309,7 @@
                   <a:spcPts val="303"/>
                 </a:spcAft>
               </a:pPr>
-              <a:t>15</a:t>
+              <a:t>12</a:t>
             </a:fld>
             <a:endParaRPr lang="en-US" sz="706" dirty="0"/>
           </a:p>
@@ -16626,6 +14877,1755 @@
       <p:bldP spid="5" grpId="0" animBg="1"/>
     </p:bldLst>
   </p:timing>
+</p:sld>
+</file>
+
+<file path=ppt/slides/slide13.xml><?xml version="1.0" encoding="utf-8"?>
+<p:sld xmlns:a="http://schemas.openxmlformats.org/drawingml/2006/main" xmlns:r="http://schemas.openxmlformats.org/officeDocument/2006/relationships" xmlns:p="http://schemas.openxmlformats.org/presentationml/2006/main">
+  <p:cSld>
+    <p:spTree>
+      <p:nvGrpSpPr>
+        <p:cNvPr id="1" name=""/>
+        <p:cNvGrpSpPr/>
+        <p:nvPr/>
+      </p:nvGrpSpPr>
+      <p:grpSpPr>
+        <a:xfrm>
+          <a:off x="0" y="0"/>
+          <a:ext cx="0" cy="0"/>
+          <a:chOff x="0" y="0"/>
+          <a:chExt cx="0" cy="0"/>
+        </a:xfrm>
+      </p:grpSpPr>
+      <p:sp>
+        <p:nvSpPr>
+          <p:cNvPr id="2" name="Title 1">
+            <a:extLst>
+              <a:ext uri="{FF2B5EF4-FFF2-40B4-BE49-F238E27FC236}">
+                <a16:creationId xmlns:a16="http://schemas.microsoft.com/office/drawing/2014/main" id="{2864372D-1F4A-209C-68DB-CBD3408D1467}"/>
+              </a:ext>
+            </a:extLst>
+          </p:cNvPr>
+          <p:cNvSpPr>
+            <a:spLocks noGrp="1"/>
+          </p:cNvSpPr>
+          <p:nvPr>
+            <p:ph type="title"/>
+          </p:nvPr>
+        </p:nvSpPr>
+        <p:spPr/>
+        <p:txBody>
+          <a:bodyPr>
+            <a:normAutofit/>
+          </a:bodyPr>
+          <a:lstStyle/>
+          <a:p>
+            <a:r>
+              <a:rPr lang="en-US" sz="1800" b="1" dirty="0"/>
+              <a:t>if expression and lambdas</a:t>
+            </a:r>
+          </a:p>
+        </p:txBody>
+      </p:sp>
+      <p:sp>
+        <p:nvSpPr>
+          <p:cNvPr id="3" name="Content Placeholder 2">
+            <a:extLst>
+              <a:ext uri="{FF2B5EF4-FFF2-40B4-BE49-F238E27FC236}">
+                <a16:creationId xmlns:a16="http://schemas.microsoft.com/office/drawing/2014/main" id="{C30FE8E5-41D4-7A0F-A698-B75A5A1002E1}"/>
+              </a:ext>
+            </a:extLst>
+          </p:cNvPr>
+          <p:cNvSpPr>
+            <a:spLocks noGrp="1"/>
+          </p:cNvSpPr>
+          <p:nvPr>
+            <p:ph idx="1"/>
+          </p:nvPr>
+        </p:nvSpPr>
+        <p:spPr/>
+        <p:txBody>
+          <a:bodyPr/>
+          <a:lstStyle/>
+          <a:p>
+            <a:r>
+              <a:rPr lang="en-IE" sz="1400" dirty="0"/>
+              <a:t>In Haskell, </a:t>
+            </a:r>
+            <a:r>
+              <a:rPr lang="en-IE" sz="1400" b="1" dirty="0">
+                <a:solidFill>
+                  <a:srgbClr val="FF0000"/>
+                </a:solidFill>
+              </a:rPr>
+              <a:t>if</a:t>
+            </a:r>
+            <a:r>
+              <a:rPr lang="en-IE" sz="1400" dirty="0">
+                <a:solidFill>
+                  <a:srgbClr val="FF0000"/>
+                </a:solidFill>
+              </a:rPr>
+              <a:t> is an expression</a:t>
+            </a:r>
+            <a:r>
+              <a:rPr lang="en-IE" sz="1400" dirty="0"/>
+              <a:t>, not a statement.</a:t>
+            </a:r>
+          </a:p>
+          <a:p>
+            <a:pPr marL="0" indent="0">
+              <a:buNone/>
+            </a:pPr>
+            <a:endParaRPr lang="en-IE" sz="1400" dirty="0"/>
+          </a:p>
+          <a:p>
+            <a:r>
+              <a:rPr lang="en-IE" sz="1400" dirty="0"/>
+              <a:t>That means it can appear </a:t>
+            </a:r>
+            <a:r>
+              <a:rPr lang="en-IE" sz="1400" b="1" dirty="0"/>
+              <a:t>anywhere an expression is allowed</a:t>
+            </a:r>
+            <a:r>
+              <a:rPr lang="en-IE" sz="1400" dirty="0"/>
+              <a:t> — including inside a lambda.</a:t>
+            </a:r>
+          </a:p>
+          <a:p>
+            <a:pPr marL="0" indent="0">
+              <a:buNone/>
+            </a:pPr>
+            <a:endParaRPr lang="en-IE" dirty="0"/>
+          </a:p>
+          <a:p>
+            <a:endParaRPr lang="en-US" dirty="0"/>
+          </a:p>
+        </p:txBody>
+      </p:sp>
+      <p:sp>
+        <p:nvSpPr>
+          <p:cNvPr id="4" name="Slide Number Placeholder 2">
+            <a:extLst>
+              <a:ext uri="{FF2B5EF4-FFF2-40B4-BE49-F238E27FC236}">
+                <a16:creationId xmlns:a16="http://schemas.microsoft.com/office/drawing/2014/main" id="{37003F18-8AC1-6615-0EDF-706F3D66E323}"/>
+              </a:ext>
+            </a:extLst>
+          </p:cNvPr>
+          <p:cNvSpPr>
+            <a:spLocks noGrp="1"/>
+          </p:cNvSpPr>
+          <p:nvPr>
+            <p:ph type="sldNum" sz="quarter" idx="12"/>
+          </p:nvPr>
+        </p:nvSpPr>
+        <p:spPr>
+          <a:xfrm>
+            <a:off x="3957002" y="380102"/>
+            <a:ext cx="583661" cy="550444"/>
+          </a:xfrm>
+          <a:extLst>
+            <a:ext uri="{909E8E84-426E-40dd-AFC4-6F175D3DCCD1}">
+              <a14:hiddenFill xmlns:a14="http://schemas.microsoft.com/office/drawing/2010/main" xmlns="">
+                <a:solidFill>
+                  <a:srgbClr val="FFFFFF"/>
+                </a:solidFill>
+              </a14:hiddenFill>
+            </a:ext>
+            <a:ext uri="{91240B29-F687-4f45-9708-019B960494DF}">
+              <a14:hiddenLine xmlns:a14="http://schemas.microsoft.com/office/drawing/2010/main" xmlns="" w="9525">
+                <a:solidFill>
+                  <a:srgbClr val="000000"/>
+                </a:solidFill>
+                <a:miter lim="800000"/>
+                <a:headEnd/>
+                <a:tailEnd/>
+              </a14:hiddenLine>
+            </a:ext>
+          </a:extLst>
+        </p:spPr>
+        <p:txBody>
+          <a:bodyPr wrap="square" anchor="t">
+            <a:normAutofit/>
+          </a:bodyPr>
+          <a:lstStyle>
+            <a:lvl1pPr>
+              <a:defRPr sz="1412">
+                <a:solidFill>
+                  <a:schemeClr val="tx1"/>
+                </a:solidFill>
+                <a:latin typeface="Tahoma" charset="0"/>
+                <a:ea typeface="ＭＳ Ｐゴシック" charset="0"/>
+                <a:cs typeface="ＭＳ Ｐゴシック" charset="0"/>
+              </a:defRPr>
+            </a:lvl1pPr>
+            <a:lvl2pPr marL="374595" indent="-144075">
+              <a:defRPr sz="1412">
+                <a:solidFill>
+                  <a:schemeClr val="tx1"/>
+                </a:solidFill>
+                <a:latin typeface="Tahoma" charset="0"/>
+                <a:ea typeface="ＭＳ Ｐゴシック" charset="0"/>
+              </a:defRPr>
+            </a:lvl2pPr>
+            <a:lvl3pPr marL="576301" indent="-115260">
+              <a:defRPr sz="1412">
+                <a:solidFill>
+                  <a:schemeClr val="tx1"/>
+                </a:solidFill>
+                <a:latin typeface="Tahoma" charset="0"/>
+                <a:ea typeface="ＭＳ Ｐゴシック" charset="0"/>
+              </a:defRPr>
+            </a:lvl3pPr>
+            <a:lvl4pPr marL="806821" indent="-115260">
+              <a:defRPr sz="1412">
+                <a:solidFill>
+                  <a:schemeClr val="tx1"/>
+                </a:solidFill>
+                <a:latin typeface="Tahoma" charset="0"/>
+                <a:ea typeface="ＭＳ Ｐゴシック" charset="0"/>
+              </a:defRPr>
+            </a:lvl4pPr>
+            <a:lvl5pPr marL="1037341" indent="-115260">
+              <a:defRPr sz="1412">
+                <a:solidFill>
+                  <a:schemeClr val="tx1"/>
+                </a:solidFill>
+                <a:latin typeface="Tahoma" charset="0"/>
+                <a:ea typeface="ＭＳ Ｐゴシック" charset="0"/>
+              </a:defRPr>
+            </a:lvl5pPr>
+            <a:lvl6pPr marL="1267861" indent="-115260" eaLnBrk="0" fontAlgn="base" hangingPunct="0">
+              <a:spcBef>
+                <a:spcPct val="0"/>
+              </a:spcBef>
+              <a:spcAft>
+                <a:spcPct val="0"/>
+              </a:spcAft>
+              <a:defRPr sz="1412">
+                <a:solidFill>
+                  <a:schemeClr val="tx1"/>
+                </a:solidFill>
+                <a:latin typeface="Tahoma" charset="0"/>
+                <a:ea typeface="ＭＳ Ｐゴシック" charset="0"/>
+              </a:defRPr>
+            </a:lvl6pPr>
+            <a:lvl7pPr marL="1498382" indent="-115260" eaLnBrk="0" fontAlgn="base" hangingPunct="0">
+              <a:spcBef>
+                <a:spcPct val="0"/>
+              </a:spcBef>
+              <a:spcAft>
+                <a:spcPct val="0"/>
+              </a:spcAft>
+              <a:defRPr sz="1412">
+                <a:solidFill>
+                  <a:schemeClr val="tx1"/>
+                </a:solidFill>
+                <a:latin typeface="Tahoma" charset="0"/>
+                <a:ea typeface="ＭＳ Ｐゴシック" charset="0"/>
+              </a:defRPr>
+            </a:lvl7pPr>
+            <a:lvl8pPr marL="1728902" indent="-115260" eaLnBrk="0" fontAlgn="base" hangingPunct="0">
+              <a:spcBef>
+                <a:spcPct val="0"/>
+              </a:spcBef>
+              <a:spcAft>
+                <a:spcPct val="0"/>
+              </a:spcAft>
+              <a:defRPr sz="1412">
+                <a:solidFill>
+                  <a:schemeClr val="tx1"/>
+                </a:solidFill>
+                <a:latin typeface="Tahoma" charset="0"/>
+                <a:ea typeface="ＭＳ Ｐゴシック" charset="0"/>
+              </a:defRPr>
+            </a:lvl8pPr>
+            <a:lvl9pPr marL="1959422" indent="-115260" eaLnBrk="0" fontAlgn="base" hangingPunct="0">
+              <a:spcBef>
+                <a:spcPct val="0"/>
+              </a:spcBef>
+              <a:spcAft>
+                <a:spcPct val="0"/>
+              </a:spcAft>
+              <a:defRPr sz="1412">
+                <a:solidFill>
+                  <a:schemeClr val="tx1"/>
+                </a:solidFill>
+                <a:latin typeface="Tahoma" charset="0"/>
+                <a:ea typeface="ＭＳ Ｐゴシック" charset="0"/>
+              </a:defRPr>
+            </a:lvl9pPr>
+          </a:lstStyle>
+          <a:p>
+            <a:pPr>
+              <a:spcAft>
+                <a:spcPts val="303"/>
+              </a:spcAft>
+            </a:pPr>
+            <a:fld id="{CC73A6B6-49ED-C641-8D95-0A84FA800C15}" type="slidenum">
+              <a:rPr lang="en-US" sz="706"/>
+              <a:pPr>
+                <a:spcAft>
+                  <a:spcPts val="303"/>
+                </a:spcAft>
+              </a:pPr>
+              <a:t>13</a:t>
+            </a:fld>
+            <a:endParaRPr lang="en-US" sz="706" dirty="0"/>
+          </a:p>
+        </p:txBody>
+      </p:sp>
+    </p:spTree>
+    <p:extLst>
+      <p:ext uri="{BB962C8B-B14F-4D97-AF65-F5344CB8AC3E}">
+        <p14:creationId xmlns:p14="http://schemas.microsoft.com/office/powerpoint/2010/main" val="2530075933"/>
+      </p:ext>
+    </p:extLst>
+  </p:cSld>
+  <p:clrMapOvr>
+    <a:masterClrMapping/>
+  </p:clrMapOvr>
+  <p:timing>
+    <p:tnLst>
+      <p:par>
+        <p:cTn id="1" dur="indefinite" restart="never" nodeType="tmRoot">
+          <p:childTnLst>
+            <p:seq concurrent="1" nextAc="seek">
+              <p:cTn id="2" dur="indefinite" nodeType="mainSeq">
+                <p:childTnLst>
+                  <p:par>
+                    <p:cTn id="3" fill="hold">
+                      <p:stCondLst>
+                        <p:cond delay="indefinite"/>
+                      </p:stCondLst>
+                      <p:childTnLst>
+                        <p:par>
+                          <p:cTn id="4" fill="hold">
+                            <p:stCondLst>
+                              <p:cond delay="0"/>
+                            </p:stCondLst>
+                            <p:childTnLst>
+                              <p:par>
+                                <p:cTn id="5" presetID="2" presetClass="entr" presetSubtype="4" fill="hold" nodeType="clickEffect">
+                                  <p:stCondLst>
+                                    <p:cond delay="0"/>
+                                  </p:stCondLst>
+                                  <p:childTnLst>
+                                    <p:set>
+                                      <p:cBhvr>
+                                        <p:cTn id="6" dur="1" fill="hold">
+                                          <p:stCondLst>
+                                            <p:cond delay="0"/>
+                                          </p:stCondLst>
+                                        </p:cTn>
+                                        <p:tgtEl>
+                                          <p:spTgt spid="3">
+                                            <p:txEl>
+                                              <p:pRg st="0" end="0"/>
+                                            </p:txEl>
+                                          </p:spTgt>
+                                        </p:tgtEl>
+                                        <p:attrNameLst>
+                                          <p:attrName>style.visibility</p:attrName>
+                                        </p:attrNameLst>
+                                      </p:cBhvr>
+                                      <p:to>
+                                        <p:strVal val="visible"/>
+                                      </p:to>
+                                    </p:set>
+                                    <p:anim calcmode="lin" valueType="num">
+                                      <p:cBhvr additive="base">
+                                        <p:cTn id="7" dur="500" fill="hold"/>
+                                        <p:tgtEl>
+                                          <p:spTgt spid="3">
+                                            <p:txEl>
+                                              <p:pRg st="0" end="0"/>
+                                            </p:txEl>
+                                          </p:spTgt>
+                                        </p:tgtEl>
+                                        <p:attrNameLst>
+                                          <p:attrName>ppt_x</p:attrName>
+                                        </p:attrNameLst>
+                                      </p:cBhvr>
+                                      <p:tavLst>
+                                        <p:tav tm="0">
+                                          <p:val>
+                                            <p:strVal val="#ppt_x"/>
+                                          </p:val>
+                                        </p:tav>
+                                        <p:tav tm="100000">
+                                          <p:val>
+                                            <p:strVal val="#ppt_x"/>
+                                          </p:val>
+                                        </p:tav>
+                                      </p:tavLst>
+                                    </p:anim>
+                                    <p:anim calcmode="lin" valueType="num">
+                                      <p:cBhvr additive="base">
+                                        <p:cTn id="8" dur="500" fill="hold"/>
+                                        <p:tgtEl>
+                                          <p:spTgt spid="3">
+                                            <p:txEl>
+                                              <p:pRg st="0" end="0"/>
+                                            </p:txEl>
+                                          </p:spTgt>
+                                        </p:tgtEl>
+                                        <p:attrNameLst>
+                                          <p:attrName>ppt_y</p:attrName>
+                                        </p:attrNameLst>
+                                      </p:cBhvr>
+                                      <p:tavLst>
+                                        <p:tav tm="0">
+                                          <p:val>
+                                            <p:strVal val="1+#ppt_h/2"/>
+                                          </p:val>
+                                        </p:tav>
+                                        <p:tav tm="100000">
+                                          <p:val>
+                                            <p:strVal val="#ppt_y"/>
+                                          </p:val>
+                                        </p:tav>
+                                      </p:tavLst>
+                                    </p:anim>
+                                  </p:childTnLst>
+                                </p:cTn>
+                              </p:par>
+                            </p:childTnLst>
+                          </p:cTn>
+                        </p:par>
+                      </p:childTnLst>
+                    </p:cTn>
+                  </p:par>
+                  <p:par>
+                    <p:cTn id="9" fill="hold">
+                      <p:stCondLst>
+                        <p:cond delay="indefinite"/>
+                      </p:stCondLst>
+                      <p:childTnLst>
+                        <p:par>
+                          <p:cTn id="10" fill="hold">
+                            <p:stCondLst>
+                              <p:cond delay="0"/>
+                            </p:stCondLst>
+                            <p:childTnLst>
+                              <p:par>
+                                <p:cTn id="11" presetID="2" presetClass="entr" presetSubtype="4" fill="hold" nodeType="clickEffect">
+                                  <p:stCondLst>
+                                    <p:cond delay="0"/>
+                                  </p:stCondLst>
+                                  <p:childTnLst>
+                                    <p:set>
+                                      <p:cBhvr>
+                                        <p:cTn id="12" dur="1" fill="hold">
+                                          <p:stCondLst>
+                                            <p:cond delay="0"/>
+                                          </p:stCondLst>
+                                        </p:cTn>
+                                        <p:tgtEl>
+                                          <p:spTgt spid="3">
+                                            <p:txEl>
+                                              <p:pRg st="2" end="2"/>
+                                            </p:txEl>
+                                          </p:spTgt>
+                                        </p:tgtEl>
+                                        <p:attrNameLst>
+                                          <p:attrName>style.visibility</p:attrName>
+                                        </p:attrNameLst>
+                                      </p:cBhvr>
+                                      <p:to>
+                                        <p:strVal val="visible"/>
+                                      </p:to>
+                                    </p:set>
+                                    <p:anim calcmode="lin" valueType="num">
+                                      <p:cBhvr additive="base">
+                                        <p:cTn id="13" dur="500" fill="hold"/>
+                                        <p:tgtEl>
+                                          <p:spTgt spid="3">
+                                            <p:txEl>
+                                              <p:pRg st="2" end="2"/>
+                                            </p:txEl>
+                                          </p:spTgt>
+                                        </p:tgtEl>
+                                        <p:attrNameLst>
+                                          <p:attrName>ppt_x</p:attrName>
+                                        </p:attrNameLst>
+                                      </p:cBhvr>
+                                      <p:tavLst>
+                                        <p:tav tm="0">
+                                          <p:val>
+                                            <p:strVal val="#ppt_x"/>
+                                          </p:val>
+                                        </p:tav>
+                                        <p:tav tm="100000">
+                                          <p:val>
+                                            <p:strVal val="#ppt_x"/>
+                                          </p:val>
+                                        </p:tav>
+                                      </p:tavLst>
+                                    </p:anim>
+                                    <p:anim calcmode="lin" valueType="num">
+                                      <p:cBhvr additive="base">
+                                        <p:cTn id="14" dur="500" fill="hold"/>
+                                        <p:tgtEl>
+                                          <p:spTgt spid="3">
+                                            <p:txEl>
+                                              <p:pRg st="2" end="2"/>
+                                            </p:txEl>
+                                          </p:spTgt>
+                                        </p:tgtEl>
+                                        <p:attrNameLst>
+                                          <p:attrName>ppt_y</p:attrName>
+                                        </p:attrNameLst>
+                                      </p:cBhvr>
+                                      <p:tavLst>
+                                        <p:tav tm="0">
+                                          <p:val>
+                                            <p:strVal val="1+#ppt_h/2"/>
+                                          </p:val>
+                                        </p:tav>
+                                        <p:tav tm="100000">
+                                          <p:val>
+                                            <p:strVal val="#ppt_y"/>
+                                          </p:val>
+                                        </p:tav>
+                                      </p:tavLst>
+                                    </p:anim>
+                                  </p:childTnLst>
+                                </p:cTn>
+                              </p:par>
+                            </p:childTnLst>
+                          </p:cTn>
+                        </p:par>
+                      </p:childTnLst>
+                    </p:cTn>
+                  </p:par>
+                </p:childTnLst>
+              </p:cTn>
+              <p:prevCondLst>
+                <p:cond evt="onPrev" delay="0">
+                  <p:tgtEl>
+                    <p:sldTgt/>
+                  </p:tgtEl>
+                </p:cond>
+              </p:prevCondLst>
+              <p:nextCondLst>
+                <p:cond evt="onNext" delay="0">
+                  <p:tgtEl>
+                    <p:sldTgt/>
+                  </p:tgtEl>
+                </p:cond>
+              </p:nextCondLst>
+            </p:seq>
+          </p:childTnLst>
+        </p:cTn>
+      </p:par>
+    </p:tnLst>
+  </p:timing>
+</p:sld>
+</file>
+
+<file path=ppt/slides/slide14.xml><?xml version="1.0" encoding="utf-8"?>
+<p:sld xmlns:a="http://schemas.openxmlformats.org/drawingml/2006/main" xmlns:r="http://schemas.openxmlformats.org/officeDocument/2006/relationships" xmlns:p="http://schemas.openxmlformats.org/presentationml/2006/main">
+  <p:cSld>
+    <p:spTree>
+      <p:nvGrpSpPr>
+        <p:cNvPr id="1" name=""/>
+        <p:cNvGrpSpPr/>
+        <p:nvPr/>
+      </p:nvGrpSpPr>
+      <p:grpSpPr>
+        <a:xfrm>
+          <a:off x="0" y="0"/>
+          <a:ext cx="0" cy="0"/>
+          <a:chOff x="0" y="0"/>
+          <a:chExt cx="0" cy="0"/>
+        </a:xfrm>
+      </p:grpSpPr>
+      <p:sp>
+        <p:nvSpPr>
+          <p:cNvPr id="2" name="Title 1">
+            <a:extLst>
+              <a:ext uri="{FF2B5EF4-FFF2-40B4-BE49-F238E27FC236}">
+                <a16:creationId xmlns:a16="http://schemas.microsoft.com/office/drawing/2014/main" id="{B46FEB3B-0EB1-84C6-FCDE-E1E0BB6183F6}"/>
+              </a:ext>
+            </a:extLst>
+          </p:cNvPr>
+          <p:cNvSpPr>
+            <a:spLocks noGrp="1"/>
+          </p:cNvSpPr>
+          <p:nvPr>
+            <p:ph type="title"/>
+          </p:nvPr>
+        </p:nvSpPr>
+        <p:spPr/>
+        <p:txBody>
+          <a:bodyPr/>
+          <a:lstStyle/>
+          <a:p>
+            <a:r>
+              <a:rPr lang="en-US" sz="2000" b="1" dirty="0"/>
+              <a:t>if expression and lambdas</a:t>
+            </a:r>
+            <a:endParaRPr lang="en-US" dirty="0"/>
+          </a:p>
+        </p:txBody>
+      </p:sp>
+      <p:sp>
+        <p:nvSpPr>
+          <p:cNvPr id="4" name="Text Box 9">
+            <a:extLst>
+              <a:ext uri="{FF2B5EF4-FFF2-40B4-BE49-F238E27FC236}">
+                <a16:creationId xmlns:a16="http://schemas.microsoft.com/office/drawing/2014/main" id="{D2451261-021B-152E-5F8E-F45872955F4D}"/>
+              </a:ext>
+            </a:extLst>
+          </p:cNvPr>
+          <p:cNvSpPr txBox="1">
+            <a:spLocks noChangeArrowheads="1"/>
+          </p:cNvSpPr>
+          <p:nvPr/>
+        </p:nvSpPr>
+        <p:spPr bwMode="auto">
+          <a:xfrm>
+            <a:off x="273832" y="1120775"/>
+            <a:ext cx="1752600" cy="738664"/>
+          </a:xfrm>
+          <a:prstGeom prst="rect">
+            <a:avLst/>
+          </a:prstGeom>
+          <a:solidFill>
+            <a:schemeClr val="accent1"/>
+          </a:solidFill>
+          <a:ln>
+            <a:solidFill>
+              <a:schemeClr val="accent1">
+                <a:shade val="15000"/>
+              </a:schemeClr>
+            </a:solidFill>
+          </a:ln>
+          <a:effectLst/>
+        </p:spPr>
+        <p:txBody>
+          <a:bodyPr wrap="square" anchor="ctr">
+            <a:spAutoFit/>
+          </a:bodyPr>
+          <a:lstStyle/>
+          <a:p>
+            <a:r>
+              <a:rPr lang="en-IE" sz="1400" dirty="0"/>
+              <a:t>\x -&gt; \y -&gt;</a:t>
+            </a:r>
+          </a:p>
+          <a:p>
+            <a:r>
+              <a:rPr lang="en-IE" sz="1400" dirty="0"/>
+              <a:t>  </a:t>
+            </a:r>
+            <a:r>
+              <a:rPr lang="en-IE" sz="1400" b="1" dirty="0">
+                <a:solidFill>
+                  <a:schemeClr val="bg1"/>
+                </a:solidFill>
+              </a:rPr>
+              <a:t>if x &lt; y then -1</a:t>
+            </a:r>
+          </a:p>
+          <a:p>
+            <a:r>
+              <a:rPr lang="en-IE" sz="1400" b="1" dirty="0">
+                <a:solidFill>
+                  <a:schemeClr val="bg1"/>
+                </a:solidFill>
+              </a:rPr>
+              <a:t>  else 1</a:t>
+            </a:r>
+          </a:p>
+        </p:txBody>
+      </p:sp>
+      <p:sp>
+        <p:nvSpPr>
+          <p:cNvPr id="7" name="Text Box 9">
+            <a:extLst>
+              <a:ext uri="{FF2B5EF4-FFF2-40B4-BE49-F238E27FC236}">
+                <a16:creationId xmlns:a16="http://schemas.microsoft.com/office/drawing/2014/main" id="{B3851283-D0FF-9EAC-CCDA-0D2B5AAF0323}"/>
+              </a:ext>
+            </a:extLst>
+          </p:cNvPr>
+          <p:cNvSpPr txBox="1">
+            <a:spLocks noChangeArrowheads="1"/>
+          </p:cNvSpPr>
+          <p:nvPr/>
+        </p:nvSpPr>
+        <p:spPr bwMode="auto">
+          <a:xfrm>
+            <a:off x="277145" y="2345966"/>
+            <a:ext cx="2869418" cy="523220"/>
+          </a:xfrm>
+          <a:prstGeom prst="rect">
+            <a:avLst/>
+          </a:prstGeom>
+          <a:solidFill>
+            <a:schemeClr val="accent1"/>
+          </a:solidFill>
+          <a:ln>
+            <a:solidFill>
+              <a:schemeClr val="accent1">
+                <a:shade val="15000"/>
+              </a:schemeClr>
+            </a:solidFill>
+          </a:ln>
+          <a:effectLst/>
+        </p:spPr>
+        <p:txBody>
+          <a:bodyPr wrap="square" anchor="ctr">
+            <a:spAutoFit/>
+          </a:bodyPr>
+          <a:lstStyle/>
+          <a:p>
+            <a:r>
+              <a:rPr lang="en-US" sz="1400" dirty="0"/>
+              <a:t>(\x y -&gt; </a:t>
+            </a:r>
+            <a:r>
+              <a:rPr lang="en-US" sz="1400" dirty="0">
+                <a:solidFill>
+                  <a:schemeClr val="bg1"/>
+                </a:solidFill>
+              </a:rPr>
+              <a:t>if x &lt; y then -1 else 1</a:t>
+            </a:r>
+            <a:r>
+              <a:rPr lang="en-US" sz="1400" dirty="0"/>
+              <a:t>) 3 4</a:t>
+            </a:r>
+          </a:p>
+          <a:p>
+            <a:r>
+              <a:rPr lang="en-US" sz="1400" dirty="0"/>
+              <a:t>-1</a:t>
+            </a:r>
+          </a:p>
+        </p:txBody>
+      </p:sp>
+      <p:sp>
+        <p:nvSpPr>
+          <p:cNvPr id="8" name="Rectangular Callout 7">
+            <a:extLst>
+              <a:ext uri="{FF2B5EF4-FFF2-40B4-BE49-F238E27FC236}">
+                <a16:creationId xmlns:a16="http://schemas.microsoft.com/office/drawing/2014/main" id="{A3B6A080-9179-CAF3-6721-9BEAF2CA0C4E}"/>
+              </a:ext>
+            </a:extLst>
+          </p:cNvPr>
+          <p:cNvSpPr/>
+          <p:nvPr/>
+        </p:nvSpPr>
+        <p:spPr>
+          <a:xfrm>
+            <a:off x="2457450" y="1161852"/>
+            <a:ext cx="1600200" cy="545473"/>
+          </a:xfrm>
+          <a:prstGeom prst="wedgeRectCallout">
+            <a:avLst>
+              <a:gd name="adj1" fmla="val -85861"/>
+              <a:gd name="adj2" fmla="val -6275"/>
+            </a:avLst>
+          </a:prstGeom>
+          <a:solidFill>
+            <a:schemeClr val="accent4"/>
+          </a:solidFill>
+        </p:spPr>
+        <p:style>
+          <a:lnRef idx="2">
+            <a:schemeClr val="accent1">
+              <a:shade val="15000"/>
+            </a:schemeClr>
+          </a:lnRef>
+          <a:fillRef idx="1">
+            <a:schemeClr val="accent1"/>
+          </a:fillRef>
+          <a:effectRef idx="0">
+            <a:schemeClr val="accent1"/>
+          </a:effectRef>
+          <a:fontRef idx="minor">
+            <a:schemeClr val="lt1"/>
+          </a:fontRef>
+        </p:style>
+        <p:txBody>
+          <a:bodyPr rtlCol="0" anchor="ctr"/>
+          <a:lstStyle/>
+          <a:p>
+            <a:pPr algn="ctr"/>
+            <a:r>
+              <a:rPr lang="en-US" sz="1400" dirty="0"/>
+              <a:t>Definition of function</a:t>
+            </a:r>
+          </a:p>
+        </p:txBody>
+      </p:sp>
+      <p:sp>
+        <p:nvSpPr>
+          <p:cNvPr id="9" name="Rectangular Callout 8">
+            <a:extLst>
+              <a:ext uri="{FF2B5EF4-FFF2-40B4-BE49-F238E27FC236}">
+                <a16:creationId xmlns:a16="http://schemas.microsoft.com/office/drawing/2014/main" id="{88E651AF-6A4E-3822-B0CA-0436AFC94222}"/>
+              </a:ext>
+            </a:extLst>
+          </p:cNvPr>
+          <p:cNvSpPr/>
+          <p:nvPr/>
+        </p:nvSpPr>
+        <p:spPr>
+          <a:xfrm>
+            <a:off x="2944937" y="1753426"/>
+            <a:ext cx="1600200" cy="545473"/>
+          </a:xfrm>
+          <a:prstGeom prst="wedgeRectCallout">
+            <a:avLst>
+              <a:gd name="adj1" fmla="val -90002"/>
+              <a:gd name="adj2" fmla="val 53247"/>
+            </a:avLst>
+          </a:prstGeom>
+          <a:solidFill>
+            <a:schemeClr val="accent4"/>
+          </a:solidFill>
+        </p:spPr>
+        <p:style>
+          <a:lnRef idx="2">
+            <a:schemeClr val="accent1">
+              <a:shade val="15000"/>
+            </a:schemeClr>
+          </a:lnRef>
+          <a:fillRef idx="1">
+            <a:schemeClr val="accent1"/>
+          </a:fillRef>
+          <a:effectRef idx="0">
+            <a:schemeClr val="accent1"/>
+          </a:effectRef>
+          <a:fontRef idx="minor">
+            <a:schemeClr val="lt1"/>
+          </a:fontRef>
+        </p:style>
+        <p:txBody>
+          <a:bodyPr rtlCol="0" anchor="ctr"/>
+          <a:lstStyle/>
+          <a:p>
+            <a:pPr algn="ctr"/>
+            <a:r>
+              <a:rPr lang="en-US" sz="1400" dirty="0"/>
+              <a:t>Application of function</a:t>
+            </a:r>
+          </a:p>
+        </p:txBody>
+      </p:sp>
+      <p:sp>
+        <p:nvSpPr>
+          <p:cNvPr id="10" name="Slide Number Placeholder 2">
+            <a:extLst>
+              <a:ext uri="{FF2B5EF4-FFF2-40B4-BE49-F238E27FC236}">
+                <a16:creationId xmlns:a16="http://schemas.microsoft.com/office/drawing/2014/main" id="{11508B09-247B-B748-25C1-FA4F378DBD6F}"/>
+              </a:ext>
+            </a:extLst>
+          </p:cNvPr>
+          <p:cNvSpPr>
+            <a:spLocks noGrp="1"/>
+          </p:cNvSpPr>
+          <p:nvPr>
+            <p:ph type="sldNum" sz="quarter" idx="12"/>
+          </p:nvPr>
+        </p:nvSpPr>
+        <p:spPr>
+          <a:xfrm>
+            <a:off x="3957002" y="380102"/>
+            <a:ext cx="583661" cy="550444"/>
+          </a:xfrm>
+          <a:extLst>
+            <a:ext uri="{909E8E84-426E-40dd-AFC4-6F175D3DCCD1}">
+              <a14:hiddenFill xmlns:a14="http://schemas.microsoft.com/office/drawing/2010/main" xmlns="">
+                <a:solidFill>
+                  <a:srgbClr val="FFFFFF"/>
+                </a:solidFill>
+              </a14:hiddenFill>
+            </a:ext>
+            <a:ext uri="{91240B29-F687-4f45-9708-019B960494DF}">
+              <a14:hiddenLine xmlns:a14="http://schemas.microsoft.com/office/drawing/2010/main" xmlns="" w="9525">
+                <a:solidFill>
+                  <a:srgbClr val="000000"/>
+                </a:solidFill>
+                <a:miter lim="800000"/>
+                <a:headEnd/>
+                <a:tailEnd/>
+              </a14:hiddenLine>
+            </a:ext>
+          </a:extLst>
+        </p:spPr>
+        <p:txBody>
+          <a:bodyPr wrap="square" anchor="t">
+            <a:normAutofit/>
+          </a:bodyPr>
+          <a:lstStyle>
+            <a:lvl1pPr>
+              <a:defRPr sz="1412">
+                <a:solidFill>
+                  <a:schemeClr val="tx1"/>
+                </a:solidFill>
+                <a:latin typeface="Tahoma" charset="0"/>
+                <a:ea typeface="ＭＳ Ｐゴシック" charset="0"/>
+                <a:cs typeface="ＭＳ Ｐゴシック" charset="0"/>
+              </a:defRPr>
+            </a:lvl1pPr>
+            <a:lvl2pPr marL="374595" indent="-144075">
+              <a:defRPr sz="1412">
+                <a:solidFill>
+                  <a:schemeClr val="tx1"/>
+                </a:solidFill>
+                <a:latin typeface="Tahoma" charset="0"/>
+                <a:ea typeface="ＭＳ Ｐゴシック" charset="0"/>
+              </a:defRPr>
+            </a:lvl2pPr>
+            <a:lvl3pPr marL="576301" indent="-115260">
+              <a:defRPr sz="1412">
+                <a:solidFill>
+                  <a:schemeClr val="tx1"/>
+                </a:solidFill>
+                <a:latin typeface="Tahoma" charset="0"/>
+                <a:ea typeface="ＭＳ Ｐゴシック" charset="0"/>
+              </a:defRPr>
+            </a:lvl3pPr>
+            <a:lvl4pPr marL="806821" indent="-115260">
+              <a:defRPr sz="1412">
+                <a:solidFill>
+                  <a:schemeClr val="tx1"/>
+                </a:solidFill>
+                <a:latin typeface="Tahoma" charset="0"/>
+                <a:ea typeface="ＭＳ Ｐゴシック" charset="0"/>
+              </a:defRPr>
+            </a:lvl4pPr>
+            <a:lvl5pPr marL="1037341" indent="-115260">
+              <a:defRPr sz="1412">
+                <a:solidFill>
+                  <a:schemeClr val="tx1"/>
+                </a:solidFill>
+                <a:latin typeface="Tahoma" charset="0"/>
+                <a:ea typeface="ＭＳ Ｐゴシック" charset="0"/>
+              </a:defRPr>
+            </a:lvl5pPr>
+            <a:lvl6pPr marL="1267861" indent="-115260" eaLnBrk="0" fontAlgn="base" hangingPunct="0">
+              <a:spcBef>
+                <a:spcPct val="0"/>
+              </a:spcBef>
+              <a:spcAft>
+                <a:spcPct val="0"/>
+              </a:spcAft>
+              <a:defRPr sz="1412">
+                <a:solidFill>
+                  <a:schemeClr val="tx1"/>
+                </a:solidFill>
+                <a:latin typeface="Tahoma" charset="0"/>
+                <a:ea typeface="ＭＳ Ｐゴシック" charset="0"/>
+              </a:defRPr>
+            </a:lvl6pPr>
+            <a:lvl7pPr marL="1498382" indent="-115260" eaLnBrk="0" fontAlgn="base" hangingPunct="0">
+              <a:spcBef>
+                <a:spcPct val="0"/>
+              </a:spcBef>
+              <a:spcAft>
+                <a:spcPct val="0"/>
+              </a:spcAft>
+              <a:defRPr sz="1412">
+                <a:solidFill>
+                  <a:schemeClr val="tx1"/>
+                </a:solidFill>
+                <a:latin typeface="Tahoma" charset="0"/>
+                <a:ea typeface="ＭＳ Ｐゴシック" charset="0"/>
+              </a:defRPr>
+            </a:lvl7pPr>
+            <a:lvl8pPr marL="1728902" indent="-115260" eaLnBrk="0" fontAlgn="base" hangingPunct="0">
+              <a:spcBef>
+                <a:spcPct val="0"/>
+              </a:spcBef>
+              <a:spcAft>
+                <a:spcPct val="0"/>
+              </a:spcAft>
+              <a:defRPr sz="1412">
+                <a:solidFill>
+                  <a:schemeClr val="tx1"/>
+                </a:solidFill>
+                <a:latin typeface="Tahoma" charset="0"/>
+                <a:ea typeface="ＭＳ Ｐゴシック" charset="0"/>
+              </a:defRPr>
+            </a:lvl8pPr>
+            <a:lvl9pPr marL="1959422" indent="-115260" eaLnBrk="0" fontAlgn="base" hangingPunct="0">
+              <a:spcBef>
+                <a:spcPct val="0"/>
+              </a:spcBef>
+              <a:spcAft>
+                <a:spcPct val="0"/>
+              </a:spcAft>
+              <a:defRPr sz="1412">
+                <a:solidFill>
+                  <a:schemeClr val="tx1"/>
+                </a:solidFill>
+                <a:latin typeface="Tahoma" charset="0"/>
+                <a:ea typeface="ＭＳ Ｐゴシック" charset="0"/>
+              </a:defRPr>
+            </a:lvl9pPr>
+          </a:lstStyle>
+          <a:p>
+            <a:pPr>
+              <a:spcAft>
+                <a:spcPts val="303"/>
+              </a:spcAft>
+            </a:pPr>
+            <a:fld id="{CC73A6B6-49ED-C641-8D95-0A84FA800C15}" type="slidenum">
+              <a:rPr lang="en-US" sz="706"/>
+              <a:pPr>
+                <a:spcAft>
+                  <a:spcPts val="303"/>
+                </a:spcAft>
+              </a:pPr>
+              <a:t>14</a:t>
+            </a:fld>
+            <a:endParaRPr lang="en-US" sz="706" dirty="0"/>
+          </a:p>
+        </p:txBody>
+      </p:sp>
+    </p:spTree>
+    <p:extLst>
+      <p:ext uri="{BB962C8B-B14F-4D97-AF65-F5344CB8AC3E}">
+        <p14:creationId xmlns:p14="http://schemas.microsoft.com/office/powerpoint/2010/main" val="3783239082"/>
+      </p:ext>
+    </p:extLst>
+  </p:cSld>
+  <p:clrMapOvr>
+    <a:masterClrMapping/>
+  </p:clrMapOvr>
+  <p:timing>
+    <p:tnLst>
+      <p:par>
+        <p:cTn id="1" dur="indefinite" restart="never" nodeType="tmRoot">
+          <p:childTnLst>
+            <p:seq concurrent="1" nextAc="seek">
+              <p:cTn id="2" dur="indefinite" nodeType="mainSeq">
+                <p:childTnLst>
+                  <p:par>
+                    <p:cTn id="3" fill="hold">
+                      <p:stCondLst>
+                        <p:cond delay="indefinite"/>
+                      </p:stCondLst>
+                      <p:childTnLst>
+                        <p:par>
+                          <p:cTn id="4" fill="hold">
+                            <p:stCondLst>
+                              <p:cond delay="0"/>
+                            </p:stCondLst>
+                            <p:childTnLst>
+                              <p:par>
+                                <p:cTn id="5" presetID="2" presetClass="entr" presetSubtype="4" fill="hold" grpId="0" nodeType="clickEffect">
+                                  <p:stCondLst>
+                                    <p:cond delay="0"/>
+                                  </p:stCondLst>
+                                  <p:childTnLst>
+                                    <p:set>
+                                      <p:cBhvr>
+                                        <p:cTn id="6" dur="1" fill="hold">
+                                          <p:stCondLst>
+                                            <p:cond delay="0"/>
+                                          </p:stCondLst>
+                                        </p:cTn>
+                                        <p:tgtEl>
+                                          <p:spTgt spid="4"/>
+                                        </p:tgtEl>
+                                        <p:attrNameLst>
+                                          <p:attrName>style.visibility</p:attrName>
+                                        </p:attrNameLst>
+                                      </p:cBhvr>
+                                      <p:to>
+                                        <p:strVal val="visible"/>
+                                      </p:to>
+                                    </p:set>
+                                    <p:anim calcmode="lin" valueType="num">
+                                      <p:cBhvr additive="base">
+                                        <p:cTn id="7" dur="500" fill="hold"/>
+                                        <p:tgtEl>
+                                          <p:spTgt spid="4"/>
+                                        </p:tgtEl>
+                                        <p:attrNameLst>
+                                          <p:attrName>ppt_x</p:attrName>
+                                        </p:attrNameLst>
+                                      </p:cBhvr>
+                                      <p:tavLst>
+                                        <p:tav tm="0">
+                                          <p:val>
+                                            <p:strVal val="#ppt_x"/>
+                                          </p:val>
+                                        </p:tav>
+                                        <p:tav tm="100000">
+                                          <p:val>
+                                            <p:strVal val="#ppt_x"/>
+                                          </p:val>
+                                        </p:tav>
+                                      </p:tavLst>
+                                    </p:anim>
+                                    <p:anim calcmode="lin" valueType="num">
+                                      <p:cBhvr additive="base">
+                                        <p:cTn id="8" dur="500" fill="hold"/>
+                                        <p:tgtEl>
+                                          <p:spTgt spid="4"/>
+                                        </p:tgtEl>
+                                        <p:attrNameLst>
+                                          <p:attrName>ppt_y</p:attrName>
+                                        </p:attrNameLst>
+                                      </p:cBhvr>
+                                      <p:tavLst>
+                                        <p:tav tm="0">
+                                          <p:val>
+                                            <p:strVal val="1+#ppt_h/2"/>
+                                          </p:val>
+                                        </p:tav>
+                                        <p:tav tm="100000">
+                                          <p:val>
+                                            <p:strVal val="#ppt_y"/>
+                                          </p:val>
+                                        </p:tav>
+                                      </p:tavLst>
+                                    </p:anim>
+                                  </p:childTnLst>
+                                </p:cTn>
+                              </p:par>
+                              <p:par>
+                                <p:cTn id="9" presetID="2" presetClass="entr" presetSubtype="4" fill="hold" grpId="0" nodeType="withEffect">
+                                  <p:stCondLst>
+                                    <p:cond delay="0"/>
+                                  </p:stCondLst>
+                                  <p:childTnLst>
+                                    <p:set>
+                                      <p:cBhvr>
+                                        <p:cTn id="10" dur="1" fill="hold">
+                                          <p:stCondLst>
+                                            <p:cond delay="0"/>
+                                          </p:stCondLst>
+                                        </p:cTn>
+                                        <p:tgtEl>
+                                          <p:spTgt spid="8"/>
+                                        </p:tgtEl>
+                                        <p:attrNameLst>
+                                          <p:attrName>style.visibility</p:attrName>
+                                        </p:attrNameLst>
+                                      </p:cBhvr>
+                                      <p:to>
+                                        <p:strVal val="visible"/>
+                                      </p:to>
+                                    </p:set>
+                                    <p:anim calcmode="lin" valueType="num">
+                                      <p:cBhvr additive="base">
+                                        <p:cTn id="11" dur="500" fill="hold"/>
+                                        <p:tgtEl>
+                                          <p:spTgt spid="8"/>
+                                        </p:tgtEl>
+                                        <p:attrNameLst>
+                                          <p:attrName>ppt_x</p:attrName>
+                                        </p:attrNameLst>
+                                      </p:cBhvr>
+                                      <p:tavLst>
+                                        <p:tav tm="0">
+                                          <p:val>
+                                            <p:strVal val="#ppt_x"/>
+                                          </p:val>
+                                        </p:tav>
+                                        <p:tav tm="100000">
+                                          <p:val>
+                                            <p:strVal val="#ppt_x"/>
+                                          </p:val>
+                                        </p:tav>
+                                      </p:tavLst>
+                                    </p:anim>
+                                    <p:anim calcmode="lin" valueType="num">
+                                      <p:cBhvr additive="base">
+                                        <p:cTn id="12" dur="500" fill="hold"/>
+                                        <p:tgtEl>
+                                          <p:spTgt spid="8"/>
+                                        </p:tgtEl>
+                                        <p:attrNameLst>
+                                          <p:attrName>ppt_y</p:attrName>
+                                        </p:attrNameLst>
+                                      </p:cBhvr>
+                                      <p:tavLst>
+                                        <p:tav tm="0">
+                                          <p:val>
+                                            <p:strVal val="1+#ppt_h/2"/>
+                                          </p:val>
+                                        </p:tav>
+                                        <p:tav tm="100000">
+                                          <p:val>
+                                            <p:strVal val="#ppt_y"/>
+                                          </p:val>
+                                        </p:tav>
+                                      </p:tavLst>
+                                    </p:anim>
+                                  </p:childTnLst>
+                                </p:cTn>
+                              </p:par>
+                            </p:childTnLst>
+                          </p:cTn>
+                        </p:par>
+                      </p:childTnLst>
+                    </p:cTn>
+                  </p:par>
+                  <p:par>
+                    <p:cTn id="13" fill="hold">
+                      <p:stCondLst>
+                        <p:cond delay="indefinite"/>
+                      </p:stCondLst>
+                      <p:childTnLst>
+                        <p:par>
+                          <p:cTn id="14" fill="hold">
+                            <p:stCondLst>
+                              <p:cond delay="0"/>
+                            </p:stCondLst>
+                            <p:childTnLst>
+                              <p:par>
+                                <p:cTn id="15" presetID="2" presetClass="entr" presetSubtype="4" fill="hold" grpId="0" nodeType="clickEffect">
+                                  <p:stCondLst>
+                                    <p:cond delay="0"/>
+                                  </p:stCondLst>
+                                  <p:childTnLst>
+                                    <p:set>
+                                      <p:cBhvr>
+                                        <p:cTn id="16" dur="1" fill="hold">
+                                          <p:stCondLst>
+                                            <p:cond delay="0"/>
+                                          </p:stCondLst>
+                                        </p:cTn>
+                                        <p:tgtEl>
+                                          <p:spTgt spid="7"/>
+                                        </p:tgtEl>
+                                        <p:attrNameLst>
+                                          <p:attrName>style.visibility</p:attrName>
+                                        </p:attrNameLst>
+                                      </p:cBhvr>
+                                      <p:to>
+                                        <p:strVal val="visible"/>
+                                      </p:to>
+                                    </p:set>
+                                    <p:anim calcmode="lin" valueType="num">
+                                      <p:cBhvr additive="base">
+                                        <p:cTn id="17" dur="500" fill="hold"/>
+                                        <p:tgtEl>
+                                          <p:spTgt spid="7"/>
+                                        </p:tgtEl>
+                                        <p:attrNameLst>
+                                          <p:attrName>ppt_x</p:attrName>
+                                        </p:attrNameLst>
+                                      </p:cBhvr>
+                                      <p:tavLst>
+                                        <p:tav tm="0">
+                                          <p:val>
+                                            <p:strVal val="#ppt_x"/>
+                                          </p:val>
+                                        </p:tav>
+                                        <p:tav tm="100000">
+                                          <p:val>
+                                            <p:strVal val="#ppt_x"/>
+                                          </p:val>
+                                        </p:tav>
+                                      </p:tavLst>
+                                    </p:anim>
+                                    <p:anim calcmode="lin" valueType="num">
+                                      <p:cBhvr additive="base">
+                                        <p:cTn id="18" dur="500" fill="hold"/>
+                                        <p:tgtEl>
+                                          <p:spTgt spid="7"/>
+                                        </p:tgtEl>
+                                        <p:attrNameLst>
+                                          <p:attrName>ppt_y</p:attrName>
+                                        </p:attrNameLst>
+                                      </p:cBhvr>
+                                      <p:tavLst>
+                                        <p:tav tm="0">
+                                          <p:val>
+                                            <p:strVal val="1+#ppt_h/2"/>
+                                          </p:val>
+                                        </p:tav>
+                                        <p:tav tm="100000">
+                                          <p:val>
+                                            <p:strVal val="#ppt_y"/>
+                                          </p:val>
+                                        </p:tav>
+                                      </p:tavLst>
+                                    </p:anim>
+                                  </p:childTnLst>
+                                </p:cTn>
+                              </p:par>
+                              <p:par>
+                                <p:cTn id="19" presetID="2" presetClass="entr" presetSubtype="4" fill="hold" grpId="0" nodeType="withEffect">
+                                  <p:stCondLst>
+                                    <p:cond delay="0"/>
+                                  </p:stCondLst>
+                                  <p:childTnLst>
+                                    <p:set>
+                                      <p:cBhvr>
+                                        <p:cTn id="20" dur="1" fill="hold">
+                                          <p:stCondLst>
+                                            <p:cond delay="0"/>
+                                          </p:stCondLst>
+                                        </p:cTn>
+                                        <p:tgtEl>
+                                          <p:spTgt spid="9"/>
+                                        </p:tgtEl>
+                                        <p:attrNameLst>
+                                          <p:attrName>style.visibility</p:attrName>
+                                        </p:attrNameLst>
+                                      </p:cBhvr>
+                                      <p:to>
+                                        <p:strVal val="visible"/>
+                                      </p:to>
+                                    </p:set>
+                                    <p:anim calcmode="lin" valueType="num">
+                                      <p:cBhvr additive="base">
+                                        <p:cTn id="21" dur="500" fill="hold"/>
+                                        <p:tgtEl>
+                                          <p:spTgt spid="9"/>
+                                        </p:tgtEl>
+                                        <p:attrNameLst>
+                                          <p:attrName>ppt_x</p:attrName>
+                                        </p:attrNameLst>
+                                      </p:cBhvr>
+                                      <p:tavLst>
+                                        <p:tav tm="0">
+                                          <p:val>
+                                            <p:strVal val="#ppt_x"/>
+                                          </p:val>
+                                        </p:tav>
+                                        <p:tav tm="100000">
+                                          <p:val>
+                                            <p:strVal val="#ppt_x"/>
+                                          </p:val>
+                                        </p:tav>
+                                      </p:tavLst>
+                                    </p:anim>
+                                    <p:anim calcmode="lin" valueType="num">
+                                      <p:cBhvr additive="base">
+                                        <p:cTn id="22" dur="500" fill="hold"/>
+                                        <p:tgtEl>
+                                          <p:spTgt spid="9"/>
+                                        </p:tgtEl>
+                                        <p:attrNameLst>
+                                          <p:attrName>ppt_y</p:attrName>
+                                        </p:attrNameLst>
+                                      </p:cBhvr>
+                                      <p:tavLst>
+                                        <p:tav tm="0">
+                                          <p:val>
+                                            <p:strVal val="1+#ppt_h/2"/>
+                                          </p:val>
+                                        </p:tav>
+                                        <p:tav tm="100000">
+                                          <p:val>
+                                            <p:strVal val="#ppt_y"/>
+                                          </p:val>
+                                        </p:tav>
+                                      </p:tavLst>
+                                    </p:anim>
+                                  </p:childTnLst>
+                                </p:cTn>
+                              </p:par>
+                            </p:childTnLst>
+                          </p:cTn>
+                        </p:par>
+                      </p:childTnLst>
+                    </p:cTn>
+                  </p:par>
+                </p:childTnLst>
+              </p:cTn>
+              <p:prevCondLst>
+                <p:cond evt="onPrev" delay="0">
+                  <p:tgtEl>
+                    <p:sldTgt/>
+                  </p:tgtEl>
+                </p:cond>
+              </p:prevCondLst>
+              <p:nextCondLst>
+                <p:cond evt="onNext" delay="0">
+                  <p:tgtEl>
+                    <p:sldTgt/>
+                  </p:tgtEl>
+                </p:cond>
+              </p:nextCondLst>
+            </p:seq>
+          </p:childTnLst>
+        </p:cTn>
+      </p:par>
+    </p:tnLst>
+    <p:bldLst>
+      <p:bldP spid="4" grpId="0" animBg="1"/>
+      <p:bldP spid="7" grpId="0" animBg="1"/>
+      <p:bldP spid="8" grpId="0" animBg="1"/>
+      <p:bldP spid="9" grpId="0" animBg="1"/>
+    </p:bldLst>
+  </p:timing>
+</p:sld>
+</file>
+
+<file path=ppt/slides/slide15.xml><?xml version="1.0" encoding="utf-8"?>
+<p:sld xmlns:a="http://schemas.openxmlformats.org/drawingml/2006/main" xmlns:r="http://schemas.openxmlformats.org/officeDocument/2006/relationships" xmlns:p="http://schemas.openxmlformats.org/presentationml/2006/main">
+  <p:cSld>
+    <p:spTree>
+      <p:nvGrpSpPr>
+        <p:cNvPr id="1" name=""/>
+        <p:cNvGrpSpPr/>
+        <p:nvPr/>
+      </p:nvGrpSpPr>
+      <p:grpSpPr>
+        <a:xfrm>
+          <a:off x="0" y="0"/>
+          <a:ext cx="0" cy="0"/>
+          <a:chOff x="0" y="0"/>
+          <a:chExt cx="0" cy="0"/>
+        </a:xfrm>
+      </p:grpSpPr>
+      <p:sp>
+        <p:nvSpPr>
+          <p:cNvPr id="4" name="Title 1">
+            <a:extLst>
+              <a:ext uri="{FF2B5EF4-FFF2-40B4-BE49-F238E27FC236}">
+                <a16:creationId xmlns:a16="http://schemas.microsoft.com/office/drawing/2014/main" id="{017D84B5-FF47-E9C2-FDE8-4932BBFD3022}"/>
+              </a:ext>
+            </a:extLst>
+          </p:cNvPr>
+          <p:cNvSpPr>
+            <a:spLocks noGrp="1"/>
+          </p:cNvSpPr>
+          <p:nvPr>
+            <p:ph type="title"/>
+          </p:nvPr>
+        </p:nvSpPr>
+        <p:spPr/>
+        <p:txBody>
+          <a:bodyPr/>
+          <a:lstStyle/>
+          <a:p>
+            <a:r>
+              <a:rPr lang="en-US" sz="2000" b="1" dirty="0"/>
+              <a:t>if expression and lambdas</a:t>
+            </a:r>
+            <a:endParaRPr lang="en-US" dirty="0"/>
+          </a:p>
+        </p:txBody>
+      </p:sp>
+      <p:sp>
+        <p:nvSpPr>
+          <p:cNvPr id="6" name="TextBox 5">
+            <a:extLst>
+              <a:ext uri="{FF2B5EF4-FFF2-40B4-BE49-F238E27FC236}">
+                <a16:creationId xmlns:a16="http://schemas.microsoft.com/office/drawing/2014/main" id="{207BFC10-6ED4-1F9D-60A4-4F8996BC1387}"/>
+              </a:ext>
+            </a:extLst>
+          </p:cNvPr>
+          <p:cNvSpPr txBox="1"/>
+          <p:nvPr/>
+        </p:nvSpPr>
+        <p:spPr>
+          <a:xfrm>
+            <a:off x="850524" y="1120775"/>
+            <a:ext cx="2309190" cy="2092881"/>
+          </a:xfrm>
+          <a:prstGeom prst="rect">
+            <a:avLst/>
+          </a:prstGeom>
+          <a:solidFill>
+            <a:schemeClr val="accent4"/>
+          </a:solidFill>
+          <a:ln>
+            <a:solidFill>
+              <a:schemeClr val="accent1">
+                <a:shade val="15000"/>
+              </a:schemeClr>
+            </a:solidFill>
+          </a:ln>
+        </p:spPr>
+        <p:txBody>
+          <a:bodyPr wrap="square">
+            <a:spAutoFit/>
+          </a:bodyPr>
+          <a:lstStyle/>
+          <a:p>
+            <a:r>
+              <a:rPr lang="en-US" sz="1000" dirty="0"/>
+              <a:t>(</a:t>
+            </a:r>
+            <a:r>
+              <a:rPr lang="en-US" sz="1000" dirty="0" err="1"/>
+              <a:t>λx.λy.body</a:t>
+            </a:r>
+            <a:r>
+              <a:rPr lang="en-US" sz="1000" dirty="0"/>
+              <a:t>) 3 4</a:t>
+            </a:r>
+          </a:p>
+          <a:p>
+            <a:r>
+              <a:rPr lang="en-US" sz="1000" dirty="0"/>
+              <a:t>      │</a:t>
+            </a:r>
+          </a:p>
+          <a:p>
+            <a:r>
+              <a:rPr lang="en-US" sz="1000" dirty="0"/>
+              <a:t>      │ β-reduce (x := 3)</a:t>
+            </a:r>
+          </a:p>
+          <a:p>
+            <a:r>
+              <a:rPr lang="en-US" sz="1000" dirty="0"/>
+              <a:t>      ▼</a:t>
+            </a:r>
+          </a:p>
+          <a:p>
+            <a:r>
+              <a:rPr lang="en-US" sz="1000" dirty="0"/>
+              <a:t>   </a:t>
+            </a:r>
+            <a:r>
+              <a:rPr lang="en-US" sz="1000" dirty="0" err="1"/>
+              <a:t>λy.body</a:t>
+            </a:r>
+            <a:r>
+              <a:rPr lang="en-US" sz="1000" dirty="0"/>
+              <a:t>[x := 3]</a:t>
+            </a:r>
+          </a:p>
+          <a:p>
+            <a:r>
+              <a:rPr lang="en-US" sz="1000" dirty="0"/>
+              <a:t>      │</a:t>
+            </a:r>
+          </a:p>
+          <a:p>
+            <a:r>
+              <a:rPr lang="en-US" sz="1000" dirty="0"/>
+              <a:t>      │ β-reduce (y := 4)</a:t>
+            </a:r>
+          </a:p>
+          <a:p>
+            <a:r>
+              <a:rPr lang="en-US" sz="1000" dirty="0"/>
+              <a:t>      ▼</a:t>
+            </a:r>
+          </a:p>
+          <a:p>
+            <a:r>
+              <a:rPr lang="en-US" sz="1000" dirty="0"/>
+              <a:t>   body[x := 3, y := 4]</a:t>
+            </a:r>
+          </a:p>
+          <a:p>
+            <a:r>
+              <a:rPr lang="en-US" sz="1000" dirty="0"/>
+              <a:t>      │</a:t>
+            </a:r>
+          </a:p>
+          <a:p>
+            <a:r>
+              <a:rPr lang="en-US" sz="1000" dirty="0"/>
+              <a:t>      │ evaluate if-expression</a:t>
+            </a:r>
+          </a:p>
+          <a:p>
+            <a:r>
+              <a:rPr lang="en-US" sz="1000" dirty="0"/>
+              <a:t>      ▼</a:t>
+            </a:r>
+          </a:p>
+          <a:p>
+            <a:r>
+              <a:rPr lang="en-US" sz="1000" dirty="0"/>
+              <a:t>     value</a:t>
+            </a:r>
+          </a:p>
+        </p:txBody>
+      </p:sp>
+      <p:sp>
+        <p:nvSpPr>
+          <p:cNvPr id="7" name="Slide Number Placeholder 2">
+            <a:extLst>
+              <a:ext uri="{FF2B5EF4-FFF2-40B4-BE49-F238E27FC236}">
+                <a16:creationId xmlns:a16="http://schemas.microsoft.com/office/drawing/2014/main" id="{E82B8A4D-7332-C48F-5B5C-D97064A52B94}"/>
+              </a:ext>
+            </a:extLst>
+          </p:cNvPr>
+          <p:cNvSpPr>
+            <a:spLocks noGrp="1"/>
+          </p:cNvSpPr>
+          <p:nvPr>
+            <p:ph type="sldNum" sz="quarter" idx="12"/>
+          </p:nvPr>
+        </p:nvSpPr>
+        <p:spPr>
+          <a:xfrm>
+            <a:off x="3957002" y="380102"/>
+            <a:ext cx="583661" cy="550444"/>
+          </a:xfrm>
+          <a:extLst>
+            <a:ext uri="{909E8E84-426E-40dd-AFC4-6F175D3DCCD1}">
+              <a14:hiddenFill xmlns:a14="http://schemas.microsoft.com/office/drawing/2010/main" xmlns="">
+                <a:solidFill>
+                  <a:srgbClr val="FFFFFF"/>
+                </a:solidFill>
+              </a14:hiddenFill>
+            </a:ext>
+            <a:ext uri="{91240B29-F687-4f45-9708-019B960494DF}">
+              <a14:hiddenLine xmlns:a14="http://schemas.microsoft.com/office/drawing/2010/main" xmlns="" w="9525">
+                <a:solidFill>
+                  <a:srgbClr val="000000"/>
+                </a:solidFill>
+                <a:miter lim="800000"/>
+                <a:headEnd/>
+                <a:tailEnd/>
+              </a14:hiddenLine>
+            </a:ext>
+          </a:extLst>
+        </p:spPr>
+        <p:txBody>
+          <a:bodyPr wrap="square" anchor="t">
+            <a:normAutofit/>
+          </a:bodyPr>
+          <a:lstStyle>
+            <a:lvl1pPr>
+              <a:defRPr sz="1412">
+                <a:solidFill>
+                  <a:schemeClr val="tx1"/>
+                </a:solidFill>
+                <a:latin typeface="Tahoma" charset="0"/>
+                <a:ea typeface="ＭＳ Ｐゴシック" charset="0"/>
+                <a:cs typeface="ＭＳ Ｐゴシック" charset="0"/>
+              </a:defRPr>
+            </a:lvl1pPr>
+            <a:lvl2pPr marL="374595" indent="-144075">
+              <a:defRPr sz="1412">
+                <a:solidFill>
+                  <a:schemeClr val="tx1"/>
+                </a:solidFill>
+                <a:latin typeface="Tahoma" charset="0"/>
+                <a:ea typeface="ＭＳ Ｐゴシック" charset="0"/>
+              </a:defRPr>
+            </a:lvl2pPr>
+            <a:lvl3pPr marL="576301" indent="-115260">
+              <a:defRPr sz="1412">
+                <a:solidFill>
+                  <a:schemeClr val="tx1"/>
+                </a:solidFill>
+                <a:latin typeface="Tahoma" charset="0"/>
+                <a:ea typeface="ＭＳ Ｐゴシック" charset="0"/>
+              </a:defRPr>
+            </a:lvl3pPr>
+            <a:lvl4pPr marL="806821" indent="-115260">
+              <a:defRPr sz="1412">
+                <a:solidFill>
+                  <a:schemeClr val="tx1"/>
+                </a:solidFill>
+                <a:latin typeface="Tahoma" charset="0"/>
+                <a:ea typeface="ＭＳ Ｐゴシック" charset="0"/>
+              </a:defRPr>
+            </a:lvl4pPr>
+            <a:lvl5pPr marL="1037341" indent="-115260">
+              <a:defRPr sz="1412">
+                <a:solidFill>
+                  <a:schemeClr val="tx1"/>
+                </a:solidFill>
+                <a:latin typeface="Tahoma" charset="0"/>
+                <a:ea typeface="ＭＳ Ｐゴシック" charset="0"/>
+              </a:defRPr>
+            </a:lvl5pPr>
+            <a:lvl6pPr marL="1267861" indent="-115260" eaLnBrk="0" fontAlgn="base" hangingPunct="0">
+              <a:spcBef>
+                <a:spcPct val="0"/>
+              </a:spcBef>
+              <a:spcAft>
+                <a:spcPct val="0"/>
+              </a:spcAft>
+              <a:defRPr sz="1412">
+                <a:solidFill>
+                  <a:schemeClr val="tx1"/>
+                </a:solidFill>
+                <a:latin typeface="Tahoma" charset="0"/>
+                <a:ea typeface="ＭＳ Ｐゴシック" charset="0"/>
+              </a:defRPr>
+            </a:lvl6pPr>
+            <a:lvl7pPr marL="1498382" indent="-115260" eaLnBrk="0" fontAlgn="base" hangingPunct="0">
+              <a:spcBef>
+                <a:spcPct val="0"/>
+              </a:spcBef>
+              <a:spcAft>
+                <a:spcPct val="0"/>
+              </a:spcAft>
+              <a:defRPr sz="1412">
+                <a:solidFill>
+                  <a:schemeClr val="tx1"/>
+                </a:solidFill>
+                <a:latin typeface="Tahoma" charset="0"/>
+                <a:ea typeface="ＭＳ Ｐゴシック" charset="0"/>
+              </a:defRPr>
+            </a:lvl7pPr>
+            <a:lvl8pPr marL="1728902" indent="-115260" eaLnBrk="0" fontAlgn="base" hangingPunct="0">
+              <a:spcBef>
+                <a:spcPct val="0"/>
+              </a:spcBef>
+              <a:spcAft>
+                <a:spcPct val="0"/>
+              </a:spcAft>
+              <a:defRPr sz="1412">
+                <a:solidFill>
+                  <a:schemeClr val="tx1"/>
+                </a:solidFill>
+                <a:latin typeface="Tahoma" charset="0"/>
+                <a:ea typeface="ＭＳ Ｐゴシック" charset="0"/>
+              </a:defRPr>
+            </a:lvl8pPr>
+            <a:lvl9pPr marL="1959422" indent="-115260" eaLnBrk="0" fontAlgn="base" hangingPunct="0">
+              <a:spcBef>
+                <a:spcPct val="0"/>
+              </a:spcBef>
+              <a:spcAft>
+                <a:spcPct val="0"/>
+              </a:spcAft>
+              <a:defRPr sz="1412">
+                <a:solidFill>
+                  <a:schemeClr val="tx1"/>
+                </a:solidFill>
+                <a:latin typeface="Tahoma" charset="0"/>
+                <a:ea typeface="ＭＳ Ｐゴシック" charset="0"/>
+              </a:defRPr>
+            </a:lvl9pPr>
+          </a:lstStyle>
+          <a:p>
+            <a:pPr>
+              <a:spcAft>
+                <a:spcPts val="303"/>
+              </a:spcAft>
+            </a:pPr>
+            <a:fld id="{CC73A6B6-49ED-C641-8D95-0A84FA800C15}" type="slidenum">
+              <a:rPr lang="en-US" sz="706"/>
+              <a:pPr>
+                <a:spcAft>
+                  <a:spcPts val="303"/>
+                </a:spcAft>
+              </a:pPr>
+              <a:t>15</a:t>
+            </a:fld>
+            <a:endParaRPr lang="en-US" sz="706" dirty="0"/>
+          </a:p>
+        </p:txBody>
+      </p:sp>
+    </p:spTree>
+    <p:extLst>
+      <p:ext uri="{BB962C8B-B14F-4D97-AF65-F5344CB8AC3E}">
+        <p14:creationId xmlns:p14="http://schemas.microsoft.com/office/powerpoint/2010/main" val="1632992394"/>
+      </p:ext>
+    </p:extLst>
+  </p:cSld>
+  <p:clrMapOvr>
+    <a:masterClrMapping/>
+  </p:clrMapOvr>
 </p:sld>
 </file>
 
@@ -19235,14 +19235,14 @@
           </a:xfrm>
           <a:extLst>
             <a:ext uri="{909E8E84-426E-40dd-AFC4-6F175D3DCCD1}">
-              <a14:hiddenFill xmlns="" xmlns:a14="http://schemas.microsoft.com/office/drawing/2010/main">
+              <a14:hiddenFill xmlns:a14="http://schemas.microsoft.com/office/drawing/2010/main" xmlns="">
                 <a:solidFill>
                   <a:srgbClr val="FFFFFF"/>
                 </a:solidFill>
               </a14:hiddenFill>
             </a:ext>
             <a:ext uri="{91240B29-F687-4f45-9708-019B960494DF}">
-              <a14:hiddenLine xmlns="" xmlns:a14="http://schemas.microsoft.com/office/drawing/2010/main" w="9525">
+              <a14:hiddenLine xmlns:a14="http://schemas.microsoft.com/office/drawing/2010/main" xmlns="" w="9525">
                 <a:solidFill>
                   <a:srgbClr val="000000"/>
                 </a:solidFill>
@@ -21162,7 +21162,7 @@
                             </p:stCondLst>
                             <p:childTnLst>
                               <p:par>
-                                <p:cTn id="23" presetID="2" presetClass="entr" presetSubtype="4" fill="hold" grpId="0" nodeType="clickEffect">
+                                <p:cTn id="23" presetID="2" presetClass="entr" presetSubtype="4" fill="hold" nodeType="clickEffect">
                                   <p:stCondLst>
                                     <p:cond delay="0"/>
                                   </p:stCondLst>
@@ -21175,7 +21175,11 @@
                                           </p:stCondLst>
                                         </p:cTn>
                                         <p:tgtEl>
-                                          <p:spTgt spid="9"/>
+                                          <p:spTgt spid="6">
+                                            <p:txEl>
+                                              <p:pRg st="1" end="1"/>
+                                            </p:txEl>
+                                          </p:spTgt>
                                         </p:tgtEl>
                                         <p:attrNameLst>
                                           <p:attrName>style.visibility</p:attrName>
@@ -21189,7 +21193,11 @@
                                       <p:cBhvr additive="base">
                                         <p:cTn id="25" dur="500" fill="hold"/>
                                         <p:tgtEl>
-                                          <p:spTgt spid="9"/>
+                                          <p:spTgt spid="6">
+                                            <p:txEl>
+                                              <p:pRg st="1" end="1"/>
+                                            </p:txEl>
+                                          </p:spTgt>
                                         </p:tgtEl>
                                         <p:attrNameLst>
                                           <p:attrName>ppt_x</p:attrName>
@@ -21212,7 +21220,11 @@
                                       <p:cBhvr additive="base">
                                         <p:cTn id="26" dur="500" fill="hold"/>
                                         <p:tgtEl>
-                                          <p:spTgt spid="9"/>
+                                          <p:spTgt spid="6">
+                                            <p:txEl>
+                                              <p:pRg st="1" end="1"/>
+                                            </p:txEl>
+                                          </p:spTgt>
                                         </p:tgtEl>
                                         <p:attrNameLst>
                                           <p:attrName>ppt_y</p:attrName>
@@ -21266,7 +21278,7 @@
                                           </p:stCondLst>
                                         </p:cTn>
                                         <p:tgtEl>
-                                          <p:spTgt spid="13"/>
+                                          <p:spTgt spid="9"/>
                                         </p:tgtEl>
                                         <p:attrNameLst>
                                           <p:attrName>style.visibility</p:attrName>
@@ -21280,7 +21292,7 @@
                                       <p:cBhvr additive="base">
                                         <p:cTn id="31" dur="500" fill="hold"/>
                                         <p:tgtEl>
-                                          <p:spTgt spid="13"/>
+                                          <p:spTgt spid="9"/>
                                         </p:tgtEl>
                                         <p:attrNameLst>
                                           <p:attrName>ppt_x</p:attrName>
@@ -21303,7 +21315,7 @@
                                       <p:cBhvr additive="base">
                                         <p:cTn id="32" dur="500" fill="hold"/>
                                         <p:tgtEl>
-                                          <p:spTgt spid="13"/>
+                                          <p:spTgt spid="9"/>
                                         </p:tgtEl>
                                         <p:attrNameLst>
                                           <p:attrName>ppt_y</p:attrName>
@@ -21344,7 +21356,7 @@
                             </p:stCondLst>
                             <p:childTnLst>
                               <p:par>
-                                <p:cTn id="35" presetID="2" presetClass="entr" presetSubtype="4" fill="hold" nodeType="clickEffect">
+                                <p:cTn id="35" presetID="2" presetClass="entr" presetSubtype="4" fill="hold" grpId="0" nodeType="clickEffect">
                                   <p:stCondLst>
                                     <p:cond delay="0"/>
                                   </p:stCondLst>
@@ -21357,11 +21369,7 @@
                                           </p:stCondLst>
                                         </p:cTn>
                                         <p:tgtEl>
-                                          <p:spTgt spid="6">
-                                            <p:txEl>
-                                              <p:charRg st="15" end="66"/>
-                                            </p:txEl>
-                                          </p:spTgt>
+                                          <p:spTgt spid="13"/>
                                         </p:tgtEl>
                                         <p:attrNameLst>
                                           <p:attrName>style.visibility</p:attrName>
@@ -21375,11 +21383,7 @@
                                       <p:cBhvr additive="base">
                                         <p:cTn id="37" dur="500" fill="hold"/>
                                         <p:tgtEl>
-                                          <p:spTgt spid="6">
-                                            <p:txEl>
-                                              <p:charRg st="15" end="66"/>
-                                            </p:txEl>
-                                          </p:spTgt>
+                                          <p:spTgt spid="13"/>
                                         </p:tgtEl>
                                         <p:attrNameLst>
                                           <p:attrName>ppt_x</p:attrName>
@@ -21402,11 +21406,7 @@
                                       <p:cBhvr additive="base">
                                         <p:cTn id="38" dur="500" fill="hold"/>
                                         <p:tgtEl>
-                                          <p:spTgt spid="6">
-                                            <p:txEl>
-                                              <p:charRg st="15" end="66"/>
-                                            </p:txEl>
-                                          </p:spTgt>
+                                          <p:spTgt spid="13"/>
                                         </p:tgtEl>
                                         <p:attrNameLst>
                                           <p:attrName>ppt_y</p:attrName>
@@ -22106,7 +22106,7 @@
                             </p:stCondLst>
                             <p:childTnLst>
                               <p:par>
-                                <p:cTn id="23" presetID="2" presetClass="entr" presetSubtype="4" fill="hold" grpId="0" nodeType="clickEffect">
+                                <p:cTn id="23" presetID="2" presetClass="entr" presetSubtype="4" fill="hold" nodeType="clickEffect">
                                   <p:stCondLst>
                                     <p:cond delay="0"/>
                                   </p:stCondLst>
@@ -22119,7 +22119,11 @@
                                           </p:stCondLst>
                                         </p:cTn>
                                         <p:tgtEl>
-                                          <p:spTgt spid="9"/>
+                                          <p:spTgt spid="6">
+                                            <p:txEl>
+                                              <p:pRg st="1" end="1"/>
+                                            </p:txEl>
+                                          </p:spTgt>
                                         </p:tgtEl>
                                         <p:attrNameLst>
                                           <p:attrName>style.visibility</p:attrName>
@@ -22133,7 +22137,11 @@
                                       <p:cBhvr additive="base">
                                         <p:cTn id="25" dur="500" fill="hold"/>
                                         <p:tgtEl>
-                                          <p:spTgt spid="9"/>
+                                          <p:spTgt spid="6">
+                                            <p:txEl>
+                                              <p:pRg st="1" end="1"/>
+                                            </p:txEl>
+                                          </p:spTgt>
                                         </p:tgtEl>
                                         <p:attrNameLst>
                                           <p:attrName>ppt_x</p:attrName>
@@ -22156,7 +22164,11 @@
                                       <p:cBhvr additive="base">
                                         <p:cTn id="26" dur="500" fill="hold"/>
                                         <p:tgtEl>
-                                          <p:spTgt spid="9"/>
+                                          <p:spTgt spid="6">
+                                            <p:txEl>
+                                              <p:pRg st="1" end="1"/>
+                                            </p:txEl>
+                                          </p:spTgt>
                                         </p:tgtEl>
                                         <p:attrNameLst>
                                           <p:attrName>ppt_y</p:attrName>
@@ -22210,7 +22222,7 @@
                                           </p:stCondLst>
                                         </p:cTn>
                                         <p:tgtEl>
-                                          <p:spTgt spid="13"/>
+                                          <p:spTgt spid="9"/>
                                         </p:tgtEl>
                                         <p:attrNameLst>
                                           <p:attrName>style.visibility</p:attrName>
@@ -22224,7 +22236,7 @@
                                       <p:cBhvr additive="base">
                                         <p:cTn id="31" dur="500" fill="hold"/>
                                         <p:tgtEl>
-                                          <p:spTgt spid="13"/>
+                                          <p:spTgt spid="9"/>
                                         </p:tgtEl>
                                         <p:attrNameLst>
                                           <p:attrName>ppt_x</p:attrName>
@@ -22247,7 +22259,7 @@
                                       <p:cBhvr additive="base">
                                         <p:cTn id="32" dur="500" fill="hold"/>
                                         <p:tgtEl>
-                                          <p:spTgt spid="13"/>
+                                          <p:spTgt spid="9"/>
                                         </p:tgtEl>
                                         <p:attrNameLst>
                                           <p:attrName>ppt_y</p:attrName>
@@ -22288,7 +22300,7 @@
                             </p:stCondLst>
                             <p:childTnLst>
                               <p:par>
-                                <p:cTn id="35" presetID="2" presetClass="entr" presetSubtype="4" fill="hold" nodeType="clickEffect">
+                                <p:cTn id="35" presetID="2" presetClass="entr" presetSubtype="4" fill="hold" grpId="0" nodeType="clickEffect">
                                   <p:stCondLst>
                                     <p:cond delay="0"/>
                                   </p:stCondLst>
@@ -22301,11 +22313,7 @@
                                           </p:stCondLst>
                                         </p:cTn>
                                         <p:tgtEl>
-                                          <p:spTgt spid="6">
-                                            <p:txEl>
-                                              <p:pRg st="1" end="1"/>
-                                            </p:txEl>
-                                          </p:spTgt>
+                                          <p:spTgt spid="13"/>
                                         </p:tgtEl>
                                         <p:attrNameLst>
                                           <p:attrName>style.visibility</p:attrName>
@@ -22319,11 +22327,7 @@
                                       <p:cBhvr additive="base">
                                         <p:cTn id="37" dur="500" fill="hold"/>
                                         <p:tgtEl>
-                                          <p:spTgt spid="6">
-                                            <p:txEl>
-                                              <p:pRg st="1" end="1"/>
-                                            </p:txEl>
-                                          </p:spTgt>
+                                          <p:spTgt spid="13"/>
                                         </p:tgtEl>
                                         <p:attrNameLst>
                                           <p:attrName>ppt_x</p:attrName>
@@ -22346,11 +22350,7 @@
                                       <p:cBhvr additive="base">
                                         <p:cTn id="38" dur="500" fill="hold"/>
                                         <p:tgtEl>
-                                          <p:spTgt spid="6">
-                                            <p:txEl>
-                                              <p:pRg st="1" end="1"/>
-                                            </p:txEl>
-                                          </p:spTgt>
+                                          <p:spTgt spid="13"/>
                                         </p:tgtEl>
                                         <p:attrNameLst>
                                           <p:attrName>ppt_y</p:attrName>
@@ -22673,14 +22673,14 @@
           </a:xfrm>
           <a:extLst>
             <a:ext uri="{909E8E84-426E-40dd-AFC4-6F175D3DCCD1}">
-              <a14:hiddenFill xmlns="" xmlns:a14="http://schemas.microsoft.com/office/drawing/2010/main">
+              <a14:hiddenFill xmlns:a14="http://schemas.microsoft.com/office/drawing/2010/main" xmlns="">
                 <a:solidFill>
                   <a:srgbClr val="FFFFFF"/>
                 </a:solidFill>
               </a14:hiddenFill>
             </a:ext>
             <a:ext uri="{91240B29-F687-4f45-9708-019B960494DF}">
-              <a14:hiddenLine xmlns="" xmlns:a14="http://schemas.microsoft.com/office/drawing/2010/main" w="9525">
+              <a14:hiddenLine xmlns:a14="http://schemas.microsoft.com/office/drawing/2010/main" xmlns="" w="9525">
                 <a:solidFill>
                   <a:srgbClr val="000000"/>
                 </a:solidFill>
@@ -24062,7 +24062,7 @@
                             </p:stCondLst>
                             <p:childTnLst>
                               <p:par>
-                                <p:cTn id="23" presetID="2" presetClass="entr" presetSubtype="4" fill="hold" grpId="0" nodeType="clickEffect">
+                                <p:cTn id="23" presetID="2" presetClass="entr" presetSubtype="4" fill="hold" nodeType="clickEffect">
                                   <p:stCondLst>
                                     <p:cond delay="0"/>
                                   </p:stCondLst>
@@ -24075,7 +24075,11 @@
                                           </p:stCondLst>
                                         </p:cTn>
                                         <p:tgtEl>
-                                          <p:spTgt spid="9"/>
+                                          <p:spTgt spid="6">
+                                            <p:txEl>
+                                              <p:pRg st="1" end="1"/>
+                                            </p:txEl>
+                                          </p:spTgt>
                                         </p:tgtEl>
                                         <p:attrNameLst>
                                           <p:attrName>style.visibility</p:attrName>
@@ -24089,7 +24093,11 @@
                                       <p:cBhvr additive="base">
                                         <p:cTn id="25" dur="500" fill="hold"/>
                                         <p:tgtEl>
-                                          <p:spTgt spid="9"/>
+                                          <p:spTgt spid="6">
+                                            <p:txEl>
+                                              <p:pRg st="1" end="1"/>
+                                            </p:txEl>
+                                          </p:spTgt>
                                         </p:tgtEl>
                                         <p:attrNameLst>
                                           <p:attrName>ppt_x</p:attrName>
@@ -24112,7 +24120,11 @@
                                       <p:cBhvr additive="base">
                                         <p:cTn id="26" dur="500" fill="hold"/>
                                         <p:tgtEl>
-                                          <p:spTgt spid="9"/>
+                                          <p:spTgt spid="6">
+                                            <p:txEl>
+                                              <p:pRg st="1" end="1"/>
+                                            </p:txEl>
+                                          </p:spTgt>
                                         </p:tgtEl>
                                         <p:attrNameLst>
                                           <p:attrName>ppt_y</p:attrName>
@@ -24166,7 +24178,7 @@
                                           </p:stCondLst>
                                         </p:cTn>
                                         <p:tgtEl>
-                                          <p:spTgt spid="13"/>
+                                          <p:spTgt spid="9"/>
                                         </p:tgtEl>
                                         <p:attrNameLst>
                                           <p:attrName>style.visibility</p:attrName>
@@ -24180,7 +24192,7 @@
                                       <p:cBhvr additive="base">
                                         <p:cTn id="31" dur="500" fill="hold"/>
                                         <p:tgtEl>
-                                          <p:spTgt spid="13"/>
+                                          <p:spTgt spid="9"/>
                                         </p:tgtEl>
                                         <p:attrNameLst>
                                           <p:attrName>ppt_x</p:attrName>
@@ -24203,7 +24215,7 @@
                                       <p:cBhvr additive="base">
                                         <p:cTn id="32" dur="500" fill="hold"/>
                                         <p:tgtEl>
-                                          <p:spTgt spid="13"/>
+                                          <p:spTgt spid="9"/>
                                         </p:tgtEl>
                                         <p:attrNameLst>
                                           <p:attrName>ppt_y</p:attrName>
@@ -24244,7 +24256,7 @@
                             </p:stCondLst>
                             <p:childTnLst>
                               <p:par>
-                                <p:cTn id="35" presetID="2" presetClass="entr" presetSubtype="4" fill="hold" nodeType="clickEffect">
+                                <p:cTn id="35" presetID="2" presetClass="entr" presetSubtype="4" fill="hold" grpId="0" nodeType="clickEffect">
                                   <p:stCondLst>
                                     <p:cond delay="0"/>
                                   </p:stCondLst>
@@ -24257,11 +24269,7 @@
                                           </p:stCondLst>
                                         </p:cTn>
                                         <p:tgtEl>
-                                          <p:spTgt spid="6">
-                                            <p:txEl>
-                                              <p:pRg st="1" end="1"/>
-                                            </p:txEl>
-                                          </p:spTgt>
+                                          <p:spTgt spid="13"/>
                                         </p:tgtEl>
                                         <p:attrNameLst>
                                           <p:attrName>style.visibility</p:attrName>
@@ -24275,11 +24283,7 @@
                                       <p:cBhvr additive="base">
                                         <p:cTn id="37" dur="500" fill="hold"/>
                                         <p:tgtEl>
-                                          <p:spTgt spid="6">
-                                            <p:txEl>
-                                              <p:pRg st="1" end="1"/>
-                                            </p:txEl>
-                                          </p:spTgt>
+                                          <p:spTgt spid="13"/>
                                         </p:tgtEl>
                                         <p:attrNameLst>
                                           <p:attrName>ppt_x</p:attrName>
@@ -24302,11 +24306,7 @@
                                       <p:cBhvr additive="base">
                                         <p:cTn id="38" dur="500" fill="hold"/>
                                         <p:tgtEl>
-                                          <p:spTgt spid="6">
-                                            <p:txEl>
-                                              <p:pRg st="1" end="1"/>
-                                            </p:txEl>
-                                          </p:spTgt>
+                                          <p:spTgt spid="13"/>
                                         </p:tgtEl>
                                         <p:attrNameLst>
                                           <p:attrName>ppt_y</p:attrName>
@@ -24426,14 +24426,14 @@
         <p:spPr>
           <a:extLst>
             <a:ext uri="{909E8E84-426E-40dd-AFC4-6F175D3DCCD1}">
-              <a14:hiddenFill xmlns="" xmlns:a14="http://schemas.microsoft.com/office/drawing/2010/main">
+              <a14:hiddenFill xmlns:a14="http://schemas.microsoft.com/office/drawing/2010/main" xmlns="">
                 <a:solidFill>
                   <a:srgbClr val="FFFFFF"/>
                 </a:solidFill>
               </a14:hiddenFill>
             </a:ext>
             <a:ext uri="{91240B29-F687-4f45-9708-019B960494DF}">
-              <a14:hiddenLine xmlns="" xmlns:a14="http://schemas.microsoft.com/office/drawing/2010/main" w="9525">
+              <a14:hiddenLine xmlns:a14="http://schemas.microsoft.com/office/drawing/2010/main" xmlns="" w="9525">
                 <a:solidFill>
                   <a:srgbClr val="000000"/>
                 </a:solidFill>
@@ -24689,10 +24689,7 @@
             <a:avLst/>
           </a:prstGeom>
           <a:solidFill>
-            <a:schemeClr val="accent4">
-              <a:lumMod val="60000"/>
-              <a:lumOff val="40000"/>
-            </a:schemeClr>
+            <a:schemeClr val="accent4"/>
           </a:solidFill>
         </p:spPr>
         <p:txBody>
@@ -24793,14 +24790,14 @@
           </a:xfrm>
           <a:extLst>
             <a:ext uri="{909E8E84-426E-40dd-AFC4-6F175D3DCCD1}">
-              <a14:hiddenFill xmlns="" xmlns:a14="http://schemas.microsoft.com/office/drawing/2010/main">
+              <a14:hiddenFill xmlns:a14="http://schemas.microsoft.com/office/drawing/2010/main" xmlns="">
                 <a:solidFill>
                   <a:srgbClr val="FFFFFF"/>
                 </a:solidFill>
               </a14:hiddenFill>
             </a:ext>
             <a:ext uri="{91240B29-F687-4f45-9708-019B960494DF}">
-              <a14:hiddenLine xmlns="" xmlns:a14="http://schemas.microsoft.com/office/drawing/2010/main" w="9525">
+              <a14:hiddenLine xmlns:a14="http://schemas.microsoft.com/office/drawing/2010/main" xmlns="" w="9525">
                 <a:solidFill>
                   <a:srgbClr val="000000"/>
                 </a:solidFill>
@@ -26075,14 +26072,14 @@
           </a:xfrm>
           <a:extLst>
             <a:ext uri="{909E8E84-426E-40dd-AFC4-6F175D3DCCD1}">
-              <a14:hiddenFill xmlns="" xmlns:a14="http://schemas.microsoft.com/office/drawing/2010/main">
+              <a14:hiddenFill xmlns:a14="http://schemas.microsoft.com/office/drawing/2010/main" xmlns="">
                 <a:solidFill>
                   <a:srgbClr val="FFFFFF"/>
                 </a:solidFill>
               </a14:hiddenFill>
             </a:ext>
             <a:ext uri="{91240B29-F687-4f45-9708-019B960494DF}">
-              <a14:hiddenLine xmlns="" xmlns:a14="http://schemas.microsoft.com/office/drawing/2010/main" w="9525">
+              <a14:hiddenLine xmlns:a14="http://schemas.microsoft.com/office/drawing/2010/main" xmlns="" w="9525">
                 <a:solidFill>
                   <a:srgbClr val="000000"/>
                 </a:solidFill>
@@ -27675,14 +27672,14 @@
           </a:xfrm>
           <a:extLst>
             <a:ext uri="{909E8E84-426E-40dd-AFC4-6F175D3DCCD1}">
-              <a14:hiddenFill xmlns="" xmlns:a14="http://schemas.microsoft.com/office/drawing/2010/main">
+              <a14:hiddenFill xmlns:a14="http://schemas.microsoft.com/office/drawing/2010/main" xmlns="">
                 <a:solidFill>
                   <a:srgbClr val="FFFFFF"/>
                 </a:solidFill>
               </a14:hiddenFill>
             </a:ext>
             <a:ext uri="{91240B29-F687-4f45-9708-019B960494DF}">
-              <a14:hiddenLine xmlns="" xmlns:a14="http://schemas.microsoft.com/office/drawing/2010/main" w="9525">
+              <a14:hiddenLine xmlns:a14="http://schemas.microsoft.com/office/drawing/2010/main" xmlns="" w="9525">
                 <a:solidFill>
                   <a:srgbClr val="000000"/>
                 </a:solidFill>
@@ -28390,14 +28387,14 @@
           </a:xfrm>
           <a:extLst>
             <a:ext uri="{909E8E84-426E-40dd-AFC4-6F175D3DCCD1}">
-              <a14:hiddenFill xmlns="" xmlns:a14="http://schemas.microsoft.com/office/drawing/2010/main">
+              <a14:hiddenFill xmlns:a14="http://schemas.microsoft.com/office/drawing/2010/main" xmlns="">
                 <a:solidFill>
                   <a:srgbClr val="FFFFFF"/>
                 </a:solidFill>
               </a14:hiddenFill>
             </a:ext>
             <a:ext uri="{91240B29-F687-4f45-9708-019B960494DF}">
-              <a14:hiddenLine xmlns="" xmlns:a14="http://schemas.microsoft.com/office/drawing/2010/main" w="9525">
+              <a14:hiddenLine xmlns:a14="http://schemas.microsoft.com/office/drawing/2010/main" xmlns="" w="9525">
                 <a:solidFill>
                   <a:srgbClr val="000000"/>
                 </a:solidFill>
@@ -29515,14 +29512,14 @@
           </a:xfrm>
           <a:extLst>
             <a:ext uri="{909E8E84-426E-40dd-AFC4-6F175D3DCCD1}">
-              <a14:hiddenFill xmlns="" xmlns:a14="http://schemas.microsoft.com/office/drawing/2010/main">
+              <a14:hiddenFill xmlns:a14="http://schemas.microsoft.com/office/drawing/2010/main" xmlns="">
                 <a:solidFill>
                   <a:srgbClr val="FFFFFF"/>
                 </a:solidFill>
               </a14:hiddenFill>
             </a:ext>
             <a:ext uri="{91240B29-F687-4f45-9708-019B960494DF}">
-              <a14:hiddenLine xmlns="" xmlns:a14="http://schemas.microsoft.com/office/drawing/2010/main" w="9525">
+              <a14:hiddenLine xmlns:a14="http://schemas.microsoft.com/office/drawing/2010/main" xmlns="" w="9525">
                 <a:solidFill>
                   <a:srgbClr val="000000"/>
                 </a:solidFill>
@@ -31548,14 +31545,14 @@
           </a:xfrm>
           <a:extLst>
             <a:ext uri="{909E8E84-426E-40dd-AFC4-6F175D3DCCD1}">
-              <a14:hiddenFill xmlns="" xmlns:a14="http://schemas.microsoft.com/office/drawing/2010/main">
+              <a14:hiddenFill xmlns:a14="http://schemas.microsoft.com/office/drawing/2010/main" xmlns="">
                 <a:solidFill>
                   <a:srgbClr val="FFFFFF"/>
                 </a:solidFill>
               </a14:hiddenFill>
             </a:ext>
             <a:ext uri="{91240B29-F687-4f45-9708-019B960494DF}">
-              <a14:hiddenLine xmlns="" xmlns:a14="http://schemas.microsoft.com/office/drawing/2010/main" w="9525">
+              <a14:hiddenLine xmlns:a14="http://schemas.microsoft.com/office/drawing/2010/main" xmlns="" w="9525">
                 <a:solidFill>
                   <a:srgbClr val="000000"/>
                 </a:solidFill>
@@ -34029,14 +34026,14 @@
           </a:xfrm>
           <a:extLst>
             <a:ext uri="{909E8E84-426E-40dd-AFC4-6F175D3DCCD1}">
-              <a14:hiddenFill xmlns="" xmlns:a14="http://schemas.microsoft.com/office/drawing/2010/main">
+              <a14:hiddenFill xmlns:a14="http://schemas.microsoft.com/office/drawing/2010/main" xmlns="">
                 <a:solidFill>
                   <a:srgbClr val="FFFFFF"/>
                 </a:solidFill>
               </a14:hiddenFill>
             </a:ext>
             <a:ext uri="{91240B29-F687-4f45-9708-019B960494DF}">
-              <a14:hiddenLine xmlns="" xmlns:a14="http://schemas.microsoft.com/office/drawing/2010/main" w="9525">
+              <a14:hiddenLine xmlns:a14="http://schemas.microsoft.com/office/drawing/2010/main" xmlns="" w="9525">
                 <a:solidFill>
                   <a:srgbClr val="000000"/>
                 </a:solidFill>
